--- a/Vizsgaremek_bemutato.pptx
+++ b/Vizsgaremek_bemutato.pptx
@@ -280,7 +280,7 @@
           <a:p>
             <a:fld id="{AE7A1593-58A1-48C6-9761-A5FB4CC6B105}" type="datetimeFigureOut">
               <a:rPr lang="hu-HU" smtClean="0"/>
-              <a:t>2026. 04. 12.</a:t>
+              <a:t>2026. 04. 13.</a:t>
             </a:fld>
             <a:endParaRPr lang="hu-HU"/>
           </a:p>
@@ -478,7 +478,7 @@
           <a:p>
             <a:fld id="{AE7A1593-58A1-48C6-9761-A5FB4CC6B105}" type="datetimeFigureOut">
               <a:rPr lang="hu-HU" smtClean="0"/>
-              <a:t>2026. 04. 12.</a:t>
+              <a:t>2026. 04. 13.</a:t>
             </a:fld>
             <a:endParaRPr lang="hu-HU"/>
           </a:p>
@@ -686,7 +686,7 @@
           <a:p>
             <a:fld id="{AE7A1593-58A1-48C6-9761-A5FB4CC6B105}" type="datetimeFigureOut">
               <a:rPr lang="hu-HU" smtClean="0"/>
-              <a:t>2026. 04. 12.</a:t>
+              <a:t>2026. 04. 13.</a:t>
             </a:fld>
             <a:endParaRPr lang="hu-HU"/>
           </a:p>
@@ -803,7 +803,7 @@
           </a:lstStyle>
           <a:p>
             <a:r>
-              <a:rPr lang="hu-HU" smtClean="0"/>
+              <a:rPr lang="hu-HU"/>
               <a:t>Mintacím szerkesztése</a:t>
             </a:r>
             <a:endParaRPr lang="en-US" dirty="0"/>
@@ -920,7 +920,7 @@
           </a:lstStyle>
           <a:p>
             <a:r>
-              <a:rPr lang="hu-HU" smtClean="0"/>
+              <a:rPr lang="hu-HU"/>
               <a:t>Kattintson ide az alcím mintájának szerkesztéséhez</a:t>
             </a:r>
             <a:endParaRPr lang="en-US" dirty="0"/>
@@ -944,7 +944,7 @@
           <a:p>
             <a:fld id="{AE7A1593-58A1-48C6-9761-A5FB4CC6B105}" type="datetimeFigureOut">
               <a:rPr lang="hu-HU" smtClean="0"/>
-              <a:t>2026. 04. 12.</a:t>
+              <a:t>2026. 04. 13.</a:t>
             </a:fld>
             <a:endParaRPr lang="hu-HU"/>
           </a:p>
@@ -1038,7 +1038,7 @@
           <a:lstStyle/>
           <a:p>
             <a:r>
-              <a:rPr lang="hu-HU" smtClean="0"/>
+              <a:rPr lang="hu-HU"/>
               <a:t>Mintacím szerkesztése</a:t>
             </a:r>
             <a:endParaRPr lang="en-US" dirty="0"/>
@@ -1062,35 +1062,35 @@
           <a:p>
             <a:pPr lvl="0"/>
             <a:r>
-              <a:rPr lang="hu-HU" smtClean="0"/>
+              <a:rPr lang="hu-HU"/>
               <a:t>Mintaszöveg szerkesztése</a:t>
             </a:r>
           </a:p>
           <a:p>
             <a:pPr lvl="1"/>
             <a:r>
-              <a:rPr lang="hu-HU" smtClean="0"/>
+              <a:rPr lang="hu-HU"/>
               <a:t>Második szint</a:t>
             </a:r>
           </a:p>
           <a:p>
             <a:pPr lvl="2"/>
             <a:r>
-              <a:rPr lang="hu-HU" smtClean="0"/>
+              <a:rPr lang="hu-HU"/>
               <a:t>Harmadik szint</a:t>
             </a:r>
           </a:p>
           <a:p>
             <a:pPr lvl="3"/>
             <a:r>
-              <a:rPr lang="hu-HU" smtClean="0"/>
+              <a:rPr lang="hu-HU"/>
               <a:t>Negyedik szint</a:t>
             </a:r>
           </a:p>
           <a:p>
             <a:pPr lvl="4"/>
             <a:r>
-              <a:rPr lang="hu-HU" smtClean="0"/>
+              <a:rPr lang="hu-HU"/>
               <a:t>Ötödik szint</a:t>
             </a:r>
             <a:endParaRPr lang="en-US" dirty="0"/>
@@ -1114,7 +1114,7 @@
           <a:p>
             <a:fld id="{AE7A1593-58A1-48C6-9761-A5FB4CC6B105}" type="datetimeFigureOut">
               <a:rPr lang="hu-HU" smtClean="0"/>
-              <a:t>2026. 04. 12.</a:t>
+              <a:t>2026. 04. 13.</a:t>
             </a:fld>
             <a:endParaRPr lang="hu-HU"/>
           </a:p>
@@ -1217,7 +1217,7 @@
           </a:lstStyle>
           <a:p>
             <a:r>
-              <a:rPr lang="hu-HU" smtClean="0"/>
+              <a:rPr lang="hu-HU"/>
               <a:t>Mintacím szerkesztése</a:t>
             </a:r>
             <a:endParaRPr lang="en-US" dirty="0"/>
@@ -1335,7 +1335,7 @@
           <a:p>
             <a:pPr lvl="0"/>
             <a:r>
-              <a:rPr lang="hu-HU" smtClean="0"/>
+              <a:rPr lang="hu-HU"/>
               <a:t>Mintaszöveg szerkesztése</a:t>
             </a:r>
           </a:p>
@@ -1358,7 +1358,7 @@
           <a:p>
             <a:fld id="{AE7A1593-58A1-48C6-9761-A5FB4CC6B105}" type="datetimeFigureOut">
               <a:rPr lang="hu-HU" smtClean="0"/>
-              <a:t>2026. 04. 12.</a:t>
+              <a:t>2026. 04. 13.</a:t>
             </a:fld>
             <a:endParaRPr lang="hu-HU"/>
           </a:p>
@@ -1452,7 +1452,7 @@
           <a:lstStyle/>
           <a:p>
             <a:r>
-              <a:rPr lang="hu-HU" smtClean="0"/>
+              <a:rPr lang="hu-HU"/>
               <a:t>Mintacím szerkesztése</a:t>
             </a:r>
             <a:endParaRPr lang="en-US" dirty="0"/>
@@ -1483,35 +1483,35 @@
           <a:p>
             <a:pPr lvl="0"/>
             <a:r>
-              <a:rPr lang="hu-HU" smtClean="0"/>
+              <a:rPr lang="hu-HU"/>
               <a:t>Mintaszöveg szerkesztése</a:t>
             </a:r>
           </a:p>
           <a:p>
             <a:pPr lvl="1"/>
             <a:r>
-              <a:rPr lang="hu-HU" smtClean="0"/>
+              <a:rPr lang="hu-HU"/>
               <a:t>Második szint</a:t>
             </a:r>
           </a:p>
           <a:p>
             <a:pPr lvl="2"/>
             <a:r>
-              <a:rPr lang="hu-HU" smtClean="0"/>
+              <a:rPr lang="hu-HU"/>
               <a:t>Harmadik szint</a:t>
             </a:r>
           </a:p>
           <a:p>
             <a:pPr lvl="3"/>
             <a:r>
-              <a:rPr lang="hu-HU" smtClean="0"/>
+              <a:rPr lang="hu-HU"/>
               <a:t>Negyedik szint</a:t>
             </a:r>
           </a:p>
           <a:p>
             <a:pPr lvl="4"/>
             <a:r>
-              <a:rPr lang="hu-HU" smtClean="0"/>
+              <a:rPr lang="hu-HU"/>
               <a:t>Ötödik szint</a:t>
             </a:r>
             <a:endParaRPr lang="en-US" dirty="0"/>
@@ -1542,35 +1542,35 @@
           <a:p>
             <a:pPr lvl="0"/>
             <a:r>
-              <a:rPr lang="hu-HU" smtClean="0"/>
+              <a:rPr lang="hu-HU"/>
               <a:t>Mintaszöveg szerkesztése</a:t>
             </a:r>
           </a:p>
           <a:p>
             <a:pPr lvl="1"/>
             <a:r>
-              <a:rPr lang="hu-HU" smtClean="0"/>
+              <a:rPr lang="hu-HU"/>
               <a:t>Második szint</a:t>
             </a:r>
           </a:p>
           <a:p>
             <a:pPr lvl="2"/>
             <a:r>
-              <a:rPr lang="hu-HU" smtClean="0"/>
+              <a:rPr lang="hu-HU"/>
               <a:t>Harmadik szint</a:t>
             </a:r>
           </a:p>
           <a:p>
             <a:pPr lvl="3"/>
             <a:r>
-              <a:rPr lang="hu-HU" smtClean="0"/>
+              <a:rPr lang="hu-HU"/>
               <a:t>Negyedik szint</a:t>
             </a:r>
           </a:p>
           <a:p>
             <a:pPr lvl="4"/>
             <a:r>
-              <a:rPr lang="hu-HU" smtClean="0"/>
+              <a:rPr lang="hu-HU"/>
               <a:t>Ötödik szint</a:t>
             </a:r>
             <a:endParaRPr lang="en-US" dirty="0"/>
@@ -1594,7 +1594,7 @@
           <a:p>
             <a:fld id="{AE7A1593-58A1-48C6-9761-A5FB4CC6B105}" type="datetimeFigureOut">
               <a:rPr lang="hu-HU" smtClean="0"/>
-              <a:t>2026. 04. 12.</a:t>
+              <a:t>2026. 04. 13.</a:t>
             </a:fld>
             <a:endParaRPr lang="hu-HU"/>
           </a:p>
@@ -1752,7 +1752,7 @@
           </a:lstStyle>
           <a:p>
             <a:r>
-              <a:rPr lang="hu-HU" smtClean="0"/>
+              <a:rPr lang="hu-HU"/>
               <a:t>Mintacím szerkesztése</a:t>
             </a:r>
             <a:endParaRPr lang="en-US" dirty="0"/>
@@ -1820,7 +1820,7 @@
           <a:p>
             <a:pPr lvl="0"/>
             <a:r>
-              <a:rPr lang="hu-HU" smtClean="0"/>
+              <a:rPr lang="hu-HU"/>
               <a:t>Mintaszöveg szerkesztése</a:t>
             </a:r>
           </a:p>
@@ -1866,35 +1866,35 @@
           <a:p>
             <a:pPr lvl="0"/>
             <a:r>
-              <a:rPr lang="hu-HU" smtClean="0"/>
+              <a:rPr lang="hu-HU"/>
               <a:t>Mintaszöveg szerkesztése</a:t>
             </a:r>
           </a:p>
           <a:p>
             <a:pPr lvl="1"/>
             <a:r>
-              <a:rPr lang="hu-HU" smtClean="0"/>
+              <a:rPr lang="hu-HU"/>
               <a:t>Második szint</a:t>
             </a:r>
           </a:p>
           <a:p>
             <a:pPr lvl="2"/>
             <a:r>
-              <a:rPr lang="hu-HU" smtClean="0"/>
+              <a:rPr lang="hu-HU"/>
               <a:t>Harmadik szint</a:t>
             </a:r>
           </a:p>
           <a:p>
             <a:pPr lvl="3"/>
             <a:r>
-              <a:rPr lang="hu-HU" smtClean="0"/>
+              <a:rPr lang="hu-HU"/>
               <a:t>Negyedik szint</a:t>
             </a:r>
           </a:p>
           <a:p>
             <a:pPr lvl="4"/>
             <a:r>
-              <a:rPr lang="hu-HU" smtClean="0"/>
+              <a:rPr lang="hu-HU"/>
               <a:t>Ötödik szint</a:t>
             </a:r>
             <a:endParaRPr lang="en-US" dirty="0"/>
@@ -1962,7 +1962,7 @@
           <a:p>
             <a:pPr lvl="0"/>
             <a:r>
-              <a:rPr lang="hu-HU" smtClean="0"/>
+              <a:rPr lang="hu-HU"/>
               <a:t>Mintaszöveg szerkesztése</a:t>
             </a:r>
           </a:p>
@@ -2008,35 +2008,35 @@
           <a:p>
             <a:pPr lvl="0"/>
             <a:r>
-              <a:rPr lang="hu-HU" smtClean="0"/>
+              <a:rPr lang="hu-HU"/>
               <a:t>Mintaszöveg szerkesztése</a:t>
             </a:r>
           </a:p>
           <a:p>
             <a:pPr lvl="1"/>
             <a:r>
-              <a:rPr lang="hu-HU" smtClean="0"/>
+              <a:rPr lang="hu-HU"/>
               <a:t>Második szint</a:t>
             </a:r>
           </a:p>
           <a:p>
             <a:pPr lvl="2"/>
             <a:r>
-              <a:rPr lang="hu-HU" smtClean="0"/>
+              <a:rPr lang="hu-HU"/>
               <a:t>Harmadik szint</a:t>
             </a:r>
           </a:p>
           <a:p>
             <a:pPr lvl="3"/>
             <a:r>
-              <a:rPr lang="hu-HU" smtClean="0"/>
+              <a:rPr lang="hu-HU"/>
               <a:t>Negyedik szint</a:t>
             </a:r>
           </a:p>
           <a:p>
             <a:pPr lvl="4"/>
             <a:r>
-              <a:rPr lang="hu-HU" smtClean="0"/>
+              <a:rPr lang="hu-HU"/>
               <a:t>Ötödik szint</a:t>
             </a:r>
             <a:endParaRPr lang="en-US" dirty="0"/>
@@ -2060,7 +2060,7 @@
           <a:p>
             <a:fld id="{AE7A1593-58A1-48C6-9761-A5FB4CC6B105}" type="datetimeFigureOut">
               <a:rPr lang="hu-HU" smtClean="0"/>
-              <a:t>2026. 04. 12.</a:t>
+              <a:t>2026. 04. 13.</a:t>
             </a:fld>
             <a:endParaRPr lang="hu-HU"/>
           </a:p>
@@ -2154,7 +2154,7 @@
           <a:lstStyle/>
           <a:p>
             <a:r>
-              <a:rPr lang="hu-HU" smtClean="0"/>
+              <a:rPr lang="hu-HU"/>
               <a:t>Mintacím szerkesztése</a:t>
             </a:r>
             <a:endParaRPr lang="en-US" dirty="0"/>
@@ -2178,7 +2178,7 @@
           <a:p>
             <a:fld id="{AE7A1593-58A1-48C6-9761-A5FB4CC6B105}" type="datetimeFigureOut">
               <a:rPr lang="hu-HU" smtClean="0"/>
-              <a:t>2026. 04. 12.</a:t>
+              <a:t>2026. 04. 13.</a:t>
             </a:fld>
             <a:endParaRPr lang="hu-HU"/>
           </a:p>
@@ -2273,7 +2273,7 @@
           <a:p>
             <a:fld id="{AE7A1593-58A1-48C6-9761-A5FB4CC6B105}" type="datetimeFigureOut">
               <a:rPr lang="hu-HU" smtClean="0"/>
-              <a:t>2026. 04. 12.</a:t>
+              <a:t>2026. 04. 13.</a:t>
             </a:fld>
             <a:endParaRPr lang="hu-HU"/>
           </a:p>
@@ -2378,7 +2378,7 @@
           </a:lstStyle>
           <a:p>
             <a:r>
-              <a:rPr lang="hu-HU" smtClean="0"/>
+              <a:rPr lang="hu-HU"/>
               <a:t>Mintacím szerkesztése</a:t>
             </a:r>
             <a:endParaRPr lang="en-US" dirty="0"/>
@@ -2409,35 +2409,35 @@
           <a:p>
             <a:pPr lvl="0"/>
             <a:r>
-              <a:rPr lang="hu-HU" smtClean="0"/>
+              <a:rPr lang="hu-HU"/>
               <a:t>Mintaszöveg szerkesztése</a:t>
             </a:r>
           </a:p>
           <a:p>
             <a:pPr lvl="1"/>
             <a:r>
-              <a:rPr lang="hu-HU" smtClean="0"/>
+              <a:rPr lang="hu-HU"/>
               <a:t>Második szint</a:t>
             </a:r>
           </a:p>
           <a:p>
             <a:pPr lvl="2"/>
             <a:r>
-              <a:rPr lang="hu-HU" smtClean="0"/>
+              <a:rPr lang="hu-HU"/>
               <a:t>Harmadik szint</a:t>
             </a:r>
           </a:p>
           <a:p>
             <a:pPr lvl="3"/>
             <a:r>
-              <a:rPr lang="hu-HU" smtClean="0"/>
+              <a:rPr lang="hu-HU"/>
               <a:t>Negyedik szint</a:t>
             </a:r>
           </a:p>
           <a:p>
             <a:pPr lvl="4"/>
             <a:r>
-              <a:rPr lang="hu-HU" smtClean="0"/>
+              <a:rPr lang="hu-HU"/>
               <a:t>Ötödik szint</a:t>
             </a:r>
             <a:endParaRPr lang="en-US" dirty="0"/>
@@ -2505,7 +2505,7 @@
           <a:p>
             <a:pPr lvl="0"/>
             <a:r>
-              <a:rPr lang="hu-HU" smtClean="0"/>
+              <a:rPr lang="hu-HU"/>
               <a:t>Mintaszöveg szerkesztése</a:t>
             </a:r>
           </a:p>
@@ -2528,7 +2528,7 @@
           <a:p>
             <a:fld id="{AE7A1593-58A1-48C6-9761-A5FB4CC6B105}" type="datetimeFigureOut">
               <a:rPr lang="hu-HU" smtClean="0"/>
-              <a:t>2026. 04. 12.</a:t>
+              <a:t>2026. 04. 13.</a:t>
             </a:fld>
             <a:endParaRPr lang="hu-HU"/>
           </a:p>
@@ -2714,7 +2714,7 @@
           <a:p>
             <a:fld id="{AE7A1593-58A1-48C6-9761-A5FB4CC6B105}" type="datetimeFigureOut">
               <a:rPr lang="hu-HU" smtClean="0"/>
-              <a:t>2026. 04. 12.</a:t>
+              <a:t>2026. 04. 13.</a:t>
             </a:fld>
             <a:endParaRPr lang="hu-HU"/>
           </a:p>
@@ -2861,7 +2861,7 @@
           </a:lstStyle>
           <a:p>
             <a:r>
-              <a:rPr lang="hu-HU" smtClean="0"/>
+              <a:rPr lang="hu-HU"/>
               <a:t>Mintacím szerkesztése</a:t>
             </a:r>
             <a:endParaRPr lang="en-US" dirty="0"/>
@@ -2935,7 +2935,7 @@
           </a:lstStyle>
           <a:p>
             <a:r>
-              <a:rPr lang="hu-HU" smtClean="0"/>
+              <a:rPr lang="hu-HU"/>
               <a:t>Kép beszúrásához kattintson az ikonra</a:t>
             </a:r>
             <a:endParaRPr lang="en-US" dirty="0"/>
@@ -3003,7 +3003,7 @@
           <a:p>
             <a:pPr lvl="0"/>
             <a:r>
-              <a:rPr lang="hu-HU" smtClean="0"/>
+              <a:rPr lang="hu-HU"/>
               <a:t>Mintaszöveg szerkesztése</a:t>
             </a:r>
           </a:p>
@@ -3026,7 +3026,7 @@
           <a:p>
             <a:fld id="{AE7A1593-58A1-48C6-9761-A5FB4CC6B105}" type="datetimeFigureOut">
               <a:rPr lang="hu-HU" smtClean="0"/>
-              <a:t>2026. 04. 12.</a:t>
+              <a:t>2026. 04. 13.</a:t>
             </a:fld>
             <a:endParaRPr lang="hu-HU"/>
           </a:p>
@@ -3161,7 +3161,7 @@
           </a:lstStyle>
           <a:p>
             <a:r>
-              <a:rPr lang="hu-HU" smtClean="0"/>
+              <a:rPr lang="hu-HU"/>
               <a:t>Mintacím szerkesztése</a:t>
             </a:r>
             <a:endParaRPr lang="en-US" dirty="0"/>
@@ -3235,7 +3235,7 @@
           </a:lstStyle>
           <a:p>
             <a:r>
-              <a:rPr lang="hu-HU" smtClean="0"/>
+              <a:rPr lang="hu-HU"/>
               <a:t>Kép beszúrásához kattintson az ikonra</a:t>
             </a:r>
             <a:endParaRPr lang="en-US" dirty="0"/>
@@ -3301,7 +3301,7 @@
           <a:p>
             <a:pPr lvl="0"/>
             <a:r>
-              <a:rPr lang="hu-HU" smtClean="0"/>
+              <a:rPr lang="hu-HU"/>
               <a:t>Mintaszöveg szerkesztése</a:t>
             </a:r>
           </a:p>
@@ -3324,7 +3324,7 @@
           <a:p>
             <a:fld id="{AE7A1593-58A1-48C6-9761-A5FB4CC6B105}" type="datetimeFigureOut">
               <a:rPr lang="hu-HU" smtClean="0"/>
-              <a:t>2026. 04. 12.</a:t>
+              <a:t>2026. 04. 13.</a:t>
             </a:fld>
             <a:endParaRPr lang="hu-HU"/>
           </a:p>
@@ -3427,7 +3427,7 @@
           </a:lstStyle>
           <a:p>
             <a:r>
-              <a:rPr lang="hu-HU" smtClean="0"/>
+              <a:rPr lang="hu-HU"/>
               <a:t>Mintacím szerkesztése</a:t>
             </a:r>
             <a:endParaRPr lang="en-US" dirty="0"/>
@@ -3493,7 +3493,7 @@
           <a:p>
             <a:pPr lvl="0"/>
             <a:r>
-              <a:rPr lang="hu-HU" smtClean="0"/>
+              <a:rPr lang="hu-HU"/>
               <a:t>Mintaszöveg szerkesztése</a:t>
             </a:r>
           </a:p>
@@ -3516,7 +3516,7 @@
           <a:p>
             <a:fld id="{AE7A1593-58A1-48C6-9761-A5FB4CC6B105}" type="datetimeFigureOut">
               <a:rPr lang="hu-HU" smtClean="0"/>
-              <a:t>2026. 04. 12.</a:t>
+              <a:t>2026. 04. 13.</a:t>
             </a:fld>
             <a:endParaRPr lang="hu-HU"/>
           </a:p>
@@ -3619,7 +3619,7 @@
           </a:lstStyle>
           <a:p>
             <a:r>
-              <a:rPr lang="hu-HU" smtClean="0"/>
+              <a:rPr lang="hu-HU"/>
               <a:t>Mintacím szerkesztése</a:t>
             </a:r>
             <a:endParaRPr lang="en-US" dirty="0"/>
@@ -3687,7 +3687,7 @@
           <a:p>
             <a:pPr lvl="0"/>
             <a:r>
-              <a:rPr lang="hu-HU" smtClean="0"/>
+              <a:rPr lang="hu-HU"/>
               <a:t>Mintaszöveg szerkesztése</a:t>
             </a:r>
           </a:p>
@@ -3754,7 +3754,7 @@
           <a:p>
             <a:pPr lvl="0"/>
             <a:r>
-              <a:rPr lang="hu-HU" smtClean="0"/>
+              <a:rPr lang="hu-HU"/>
               <a:t>Mintaszöveg szerkesztése</a:t>
             </a:r>
           </a:p>
@@ -3777,7 +3777,7 @@
           <a:p>
             <a:fld id="{AE7A1593-58A1-48C6-9761-A5FB4CC6B105}" type="datetimeFigureOut">
               <a:rPr lang="hu-HU" smtClean="0"/>
-              <a:t>2026. 04. 12.</a:t>
+              <a:t>2026. 04. 13.</a:t>
             </a:fld>
             <a:endParaRPr lang="hu-HU"/>
           </a:p>
@@ -4112,7 +4112,7 @@
           </a:lstStyle>
           <a:p>
             <a:r>
-              <a:rPr lang="hu-HU" smtClean="0"/>
+              <a:rPr lang="hu-HU"/>
               <a:t>Mintacím szerkesztése</a:t>
             </a:r>
             <a:endParaRPr lang="en-US" dirty="0"/>
@@ -4178,7 +4178,7 @@
           <a:p>
             <a:pPr lvl="0"/>
             <a:r>
-              <a:rPr lang="hu-HU" smtClean="0"/>
+              <a:rPr lang="hu-HU"/>
               <a:t>Mintaszöveg szerkesztése</a:t>
             </a:r>
           </a:p>
@@ -4201,7 +4201,7 @@
           <a:p>
             <a:fld id="{AE7A1593-58A1-48C6-9761-A5FB4CC6B105}" type="datetimeFigureOut">
               <a:rPr lang="hu-HU" smtClean="0"/>
-              <a:t>2026. 04. 12.</a:t>
+              <a:t>2026. 04. 13.</a:t>
             </a:fld>
             <a:endParaRPr lang="hu-HU"/>
           </a:p>
@@ -4300,7 +4300,7 @@
           <a:lstStyle/>
           <a:p>
             <a:r>
-              <a:rPr lang="hu-HU" smtClean="0"/>
+              <a:rPr lang="hu-HU"/>
               <a:t>Mintacím szerkesztése</a:t>
             </a:r>
             <a:endParaRPr lang="en-US" dirty="0"/>
@@ -4372,7 +4372,7 @@
           <a:p>
             <a:pPr lvl="0"/>
             <a:r>
-              <a:rPr lang="hu-HU" smtClean="0"/>
+              <a:rPr lang="hu-HU"/>
               <a:t>Mintaszöveg szerkesztése</a:t>
             </a:r>
           </a:p>
@@ -4439,7 +4439,7 @@
           <a:p>
             <a:pPr lvl="0"/>
             <a:r>
-              <a:rPr lang="hu-HU" smtClean="0"/>
+              <a:rPr lang="hu-HU"/>
               <a:t>Mintaszöveg szerkesztése</a:t>
             </a:r>
           </a:p>
@@ -4510,7 +4510,7 @@
           <a:p>
             <a:pPr lvl="0"/>
             <a:r>
-              <a:rPr lang="hu-HU" smtClean="0"/>
+              <a:rPr lang="hu-HU"/>
               <a:t>Mintaszöveg szerkesztése</a:t>
             </a:r>
           </a:p>
@@ -4577,7 +4577,7 @@
           <a:p>
             <a:pPr lvl="0"/>
             <a:r>
-              <a:rPr lang="hu-HU" smtClean="0"/>
+              <a:rPr lang="hu-HU"/>
               <a:t>Mintaszöveg szerkesztése</a:t>
             </a:r>
           </a:p>
@@ -4648,7 +4648,7 @@
           <a:p>
             <a:pPr lvl="0"/>
             <a:r>
-              <a:rPr lang="hu-HU" smtClean="0"/>
+              <a:rPr lang="hu-HU"/>
               <a:t>Mintaszöveg szerkesztése</a:t>
             </a:r>
           </a:p>
@@ -4715,7 +4715,7 @@
           <a:p>
             <a:pPr lvl="0"/>
             <a:r>
-              <a:rPr lang="hu-HU" smtClean="0"/>
+              <a:rPr lang="hu-HU"/>
               <a:t>Mintaszöveg szerkesztése</a:t>
             </a:r>
           </a:p>
@@ -4738,7 +4738,7 @@
           <a:p>
             <a:fld id="{AE7A1593-58A1-48C6-9761-A5FB4CC6B105}" type="datetimeFigureOut">
               <a:rPr lang="hu-HU" smtClean="0"/>
-              <a:t>2026. 04. 12.</a:t>
+              <a:t>2026. 04. 13.</a:t>
             </a:fld>
             <a:endParaRPr lang="hu-HU"/>
           </a:p>
@@ -4927,7 +4927,7 @@
           <a:lstStyle/>
           <a:p>
             <a:r>
-              <a:rPr lang="hu-HU" smtClean="0"/>
+              <a:rPr lang="hu-HU"/>
               <a:t>Mintacím szerkesztése</a:t>
             </a:r>
             <a:endParaRPr lang="en-US" dirty="0"/>
@@ -4999,7 +4999,7 @@
           <a:p>
             <a:pPr lvl="0"/>
             <a:r>
-              <a:rPr lang="hu-HU" smtClean="0"/>
+              <a:rPr lang="hu-HU"/>
               <a:t>Mintaszöveg szerkesztése</a:t>
             </a:r>
           </a:p>
@@ -5077,7 +5077,7 @@
           </a:lstStyle>
           <a:p>
             <a:r>
-              <a:rPr lang="hu-HU" smtClean="0"/>
+              <a:rPr lang="hu-HU"/>
               <a:t>Kép beszúrásához kattintson az ikonra</a:t>
             </a:r>
             <a:endParaRPr lang="en-US" dirty="0"/>
@@ -5145,7 +5145,7 @@
           <a:p>
             <a:pPr lvl="0"/>
             <a:r>
-              <a:rPr lang="hu-HU" smtClean="0"/>
+              <a:rPr lang="hu-HU"/>
               <a:t>Mintaszöveg szerkesztése</a:t>
             </a:r>
           </a:p>
@@ -5216,7 +5216,7 @@
           <a:p>
             <a:pPr lvl="0"/>
             <a:r>
-              <a:rPr lang="hu-HU" smtClean="0"/>
+              <a:rPr lang="hu-HU"/>
               <a:t>Mintaszöveg szerkesztése</a:t>
             </a:r>
           </a:p>
@@ -5294,7 +5294,7 @@
           </a:lstStyle>
           <a:p>
             <a:r>
-              <a:rPr lang="hu-HU" smtClean="0"/>
+              <a:rPr lang="hu-HU"/>
               <a:t>Kép beszúrásához kattintson az ikonra</a:t>
             </a:r>
             <a:endParaRPr lang="en-US" dirty="0"/>
@@ -5362,7 +5362,7 @@
           <a:p>
             <a:pPr lvl="0"/>
             <a:r>
-              <a:rPr lang="hu-HU" smtClean="0"/>
+              <a:rPr lang="hu-HU"/>
               <a:t>Mintaszöveg szerkesztése</a:t>
             </a:r>
           </a:p>
@@ -5433,7 +5433,7 @@
           <a:p>
             <a:pPr lvl="0"/>
             <a:r>
-              <a:rPr lang="hu-HU" smtClean="0"/>
+              <a:rPr lang="hu-HU"/>
               <a:t>Mintaszöveg szerkesztése</a:t>
             </a:r>
           </a:p>
@@ -5511,7 +5511,7 @@
           </a:lstStyle>
           <a:p>
             <a:r>
-              <a:rPr lang="hu-HU" smtClean="0"/>
+              <a:rPr lang="hu-HU"/>
               <a:t>Kép beszúrásához kattintson az ikonra</a:t>
             </a:r>
             <a:endParaRPr lang="en-US" dirty="0"/>
@@ -5579,7 +5579,7 @@
           <a:p>
             <a:pPr lvl="0"/>
             <a:r>
-              <a:rPr lang="hu-HU" smtClean="0"/>
+              <a:rPr lang="hu-HU"/>
               <a:t>Mintaszöveg szerkesztése</a:t>
             </a:r>
           </a:p>
@@ -5602,7 +5602,7 @@
           <a:p>
             <a:fld id="{AE7A1593-58A1-48C6-9761-A5FB4CC6B105}" type="datetimeFigureOut">
               <a:rPr lang="hu-HU" smtClean="0"/>
-              <a:t>2026. 04. 12.</a:t>
+              <a:t>2026. 04. 13.</a:t>
             </a:fld>
             <a:endParaRPr lang="hu-HU"/>
           </a:p>
@@ -5696,7 +5696,7 @@
           <a:lstStyle/>
           <a:p>
             <a:r>
-              <a:rPr lang="hu-HU" smtClean="0"/>
+              <a:rPr lang="hu-HU"/>
               <a:t>Mintacím szerkesztése</a:t>
             </a:r>
             <a:endParaRPr lang="en-US" dirty="0"/>
@@ -5720,35 +5720,35 @@
           <a:p>
             <a:pPr lvl="0"/>
             <a:r>
-              <a:rPr lang="hu-HU" smtClean="0"/>
+              <a:rPr lang="hu-HU"/>
               <a:t>Mintaszöveg szerkesztése</a:t>
             </a:r>
           </a:p>
           <a:p>
             <a:pPr lvl="1"/>
             <a:r>
-              <a:rPr lang="hu-HU" smtClean="0"/>
+              <a:rPr lang="hu-HU"/>
               <a:t>Második szint</a:t>
             </a:r>
           </a:p>
           <a:p>
             <a:pPr lvl="2"/>
             <a:r>
-              <a:rPr lang="hu-HU" smtClean="0"/>
+              <a:rPr lang="hu-HU"/>
               <a:t>Harmadik szint</a:t>
             </a:r>
           </a:p>
           <a:p>
             <a:pPr lvl="3"/>
             <a:r>
-              <a:rPr lang="hu-HU" smtClean="0"/>
+              <a:rPr lang="hu-HU"/>
               <a:t>Negyedik szint</a:t>
             </a:r>
           </a:p>
           <a:p>
             <a:pPr lvl="4"/>
             <a:r>
-              <a:rPr lang="hu-HU" smtClean="0"/>
+              <a:rPr lang="hu-HU"/>
               <a:t>Ötödik szint</a:t>
             </a:r>
             <a:endParaRPr lang="en-US" dirty="0"/>
@@ -5772,7 +5772,7 @@
           <a:p>
             <a:fld id="{AE7A1593-58A1-48C6-9761-A5FB4CC6B105}" type="datetimeFigureOut">
               <a:rPr lang="hu-HU" smtClean="0"/>
-              <a:t>2026. 04. 12.</a:t>
+              <a:t>2026. 04. 13.</a:t>
             </a:fld>
             <a:endParaRPr lang="hu-HU"/>
           </a:p>
@@ -5875,7 +5875,7 @@
           </a:lstStyle>
           <a:p>
             <a:r>
-              <a:rPr lang="hu-HU" smtClean="0"/>
+              <a:rPr lang="hu-HU"/>
               <a:t>Mintacím szerkesztése</a:t>
             </a:r>
             <a:endParaRPr lang="en-US" dirty="0"/>
@@ -5904,35 +5904,35 @@
           <a:p>
             <a:pPr lvl="0"/>
             <a:r>
-              <a:rPr lang="hu-HU" smtClean="0"/>
+              <a:rPr lang="hu-HU"/>
               <a:t>Mintaszöveg szerkesztése</a:t>
             </a:r>
           </a:p>
           <a:p>
             <a:pPr lvl="1"/>
             <a:r>
-              <a:rPr lang="hu-HU" smtClean="0"/>
+              <a:rPr lang="hu-HU"/>
               <a:t>Második szint</a:t>
             </a:r>
           </a:p>
           <a:p>
             <a:pPr lvl="2"/>
             <a:r>
-              <a:rPr lang="hu-HU" smtClean="0"/>
+              <a:rPr lang="hu-HU"/>
               <a:t>Harmadik szint</a:t>
             </a:r>
           </a:p>
           <a:p>
             <a:pPr lvl="3"/>
             <a:r>
-              <a:rPr lang="hu-HU" smtClean="0"/>
+              <a:rPr lang="hu-HU"/>
               <a:t>Negyedik szint</a:t>
             </a:r>
           </a:p>
           <a:p>
             <a:pPr lvl="4"/>
             <a:r>
-              <a:rPr lang="hu-HU" smtClean="0"/>
+              <a:rPr lang="hu-HU"/>
               <a:t>Ötödik szint</a:t>
             </a:r>
             <a:endParaRPr lang="en-US" dirty="0"/>
@@ -5956,7 +5956,7 @@
           <a:p>
             <a:fld id="{AE7A1593-58A1-48C6-9761-A5FB4CC6B105}" type="datetimeFigureOut">
               <a:rPr lang="hu-HU" smtClean="0"/>
-              <a:t>2026. 04. 12.</a:t>
+              <a:t>2026. 04. 13.</a:t>
             </a:fld>
             <a:endParaRPr lang="hu-HU"/>
           </a:p>
@@ -6200,7 +6200,7 @@
           </a:lstStyle>
           <a:p>
             <a:r>
-              <a:rPr lang="hu-HU" smtClean="0"/>
+              <a:rPr lang="hu-HU"/>
               <a:t>Mintacím szerkesztése</a:t>
             </a:r>
             <a:endParaRPr lang="en-US" dirty="0"/>
@@ -6267,7 +6267,7 @@
           </a:lstStyle>
           <a:p>
             <a:r>
-              <a:rPr lang="hu-HU" smtClean="0"/>
+              <a:rPr lang="hu-HU"/>
               <a:t>Kattintson ide az alcím mintájának szerkesztéséhez</a:t>
             </a:r>
             <a:endParaRPr lang="en-US" dirty="0"/>
@@ -6291,7 +6291,7 @@
           <a:p>
             <a:fld id="{AE7A1593-58A1-48C6-9761-A5FB4CC6B105}" type="datetimeFigureOut">
               <a:rPr lang="hu-HU" smtClean="0"/>
-              <a:t>2026. 04. 12.</a:t>
+              <a:t>2026. 04. 13.</a:t>
             </a:fld>
             <a:endParaRPr lang="hu-HU"/>
           </a:p>
@@ -6559,7 +6559,7 @@
           <a:p>
             <a:fld id="{AE7A1593-58A1-48C6-9761-A5FB4CC6B105}" type="datetimeFigureOut">
               <a:rPr lang="hu-HU" smtClean="0"/>
-              <a:t>2026. 04. 12.</a:t>
+              <a:t>2026. 04. 13.</a:t>
             </a:fld>
             <a:endParaRPr lang="hu-HU"/>
           </a:p>
@@ -6804,7 +6804,7 @@
           <a:lstStyle/>
           <a:p>
             <a:r>
-              <a:rPr lang="hu-HU" smtClean="0"/>
+              <a:rPr lang="hu-HU"/>
               <a:t>Mintacím szerkesztése</a:t>
             </a:r>
             <a:endParaRPr lang="en-US" dirty="0"/>
@@ -6828,35 +6828,35 @@
           <a:p>
             <a:pPr lvl="0"/>
             <a:r>
-              <a:rPr lang="hu-HU" smtClean="0"/>
+              <a:rPr lang="hu-HU"/>
               <a:t>Mintaszöveg szerkesztése</a:t>
             </a:r>
           </a:p>
           <a:p>
             <a:pPr lvl="1"/>
             <a:r>
-              <a:rPr lang="hu-HU" smtClean="0"/>
+              <a:rPr lang="hu-HU"/>
               <a:t>Második szint</a:t>
             </a:r>
           </a:p>
           <a:p>
             <a:pPr lvl="2"/>
             <a:r>
-              <a:rPr lang="hu-HU" smtClean="0"/>
+              <a:rPr lang="hu-HU"/>
               <a:t>Harmadik szint</a:t>
             </a:r>
           </a:p>
           <a:p>
             <a:pPr lvl="3"/>
             <a:r>
-              <a:rPr lang="hu-HU" smtClean="0"/>
+              <a:rPr lang="hu-HU"/>
               <a:t>Negyedik szint</a:t>
             </a:r>
           </a:p>
           <a:p>
             <a:pPr lvl="4"/>
             <a:r>
-              <a:rPr lang="hu-HU" smtClean="0"/>
+              <a:rPr lang="hu-HU"/>
               <a:t>Ötödik szint</a:t>
             </a:r>
             <a:endParaRPr lang="en-US" dirty="0"/>
@@ -6880,7 +6880,7 @@
           <a:p>
             <a:fld id="{AE7A1593-58A1-48C6-9761-A5FB4CC6B105}" type="datetimeFigureOut">
               <a:rPr lang="hu-HU" smtClean="0"/>
-              <a:t>2026. 04. 12.</a:t>
+              <a:t>2026. 04. 13.</a:t>
             </a:fld>
             <a:endParaRPr lang="hu-HU"/>
           </a:p>
@@ -7124,7 +7124,7 @@
           </a:lstStyle>
           <a:p>
             <a:r>
-              <a:rPr lang="hu-HU" smtClean="0"/>
+              <a:rPr lang="hu-HU"/>
               <a:t>Mintacím szerkesztése</a:t>
             </a:r>
             <a:endParaRPr lang="en-US" dirty="0"/>
@@ -7246,7 +7246,7 @@
           <a:p>
             <a:pPr lvl="0"/>
             <a:r>
-              <a:rPr lang="hu-HU" smtClean="0"/>
+              <a:rPr lang="hu-HU"/>
               <a:t>Mintaszöveg szerkesztése</a:t>
             </a:r>
           </a:p>
@@ -7269,7 +7269,7 @@
           <a:p>
             <a:fld id="{AE7A1593-58A1-48C6-9761-A5FB4CC6B105}" type="datetimeFigureOut">
               <a:rPr lang="hu-HU" smtClean="0"/>
-              <a:t>2026. 04. 12.</a:t>
+              <a:t>2026. 04. 13.</a:t>
             </a:fld>
             <a:endParaRPr lang="hu-HU"/>
           </a:p>
@@ -7507,7 +7507,7 @@
           <a:lstStyle/>
           <a:p>
             <a:r>
-              <a:rPr lang="hu-HU" smtClean="0"/>
+              <a:rPr lang="hu-HU"/>
               <a:t>Mintacím szerkesztése</a:t>
             </a:r>
             <a:endParaRPr lang="en-US" dirty="0"/>
@@ -7536,35 +7536,35 @@
           <a:p>
             <a:pPr lvl="0"/>
             <a:r>
-              <a:rPr lang="hu-HU" smtClean="0"/>
+              <a:rPr lang="hu-HU"/>
               <a:t>Mintaszöveg szerkesztése</a:t>
             </a:r>
           </a:p>
           <a:p>
             <a:pPr lvl="1"/>
             <a:r>
-              <a:rPr lang="hu-HU" smtClean="0"/>
+              <a:rPr lang="hu-HU"/>
               <a:t>Második szint</a:t>
             </a:r>
           </a:p>
           <a:p>
             <a:pPr lvl="2"/>
             <a:r>
-              <a:rPr lang="hu-HU" smtClean="0"/>
+              <a:rPr lang="hu-HU"/>
               <a:t>Harmadik szint</a:t>
             </a:r>
           </a:p>
           <a:p>
             <a:pPr lvl="3"/>
             <a:r>
-              <a:rPr lang="hu-HU" smtClean="0"/>
+              <a:rPr lang="hu-HU"/>
               <a:t>Negyedik szint</a:t>
             </a:r>
           </a:p>
           <a:p>
             <a:pPr lvl="4"/>
             <a:r>
-              <a:rPr lang="hu-HU" smtClean="0"/>
+              <a:rPr lang="hu-HU"/>
               <a:t>Ötödik szint</a:t>
             </a:r>
             <a:endParaRPr lang="en-US" dirty="0"/>
@@ -7593,35 +7593,35 @@
           <a:p>
             <a:pPr lvl="0"/>
             <a:r>
-              <a:rPr lang="hu-HU" smtClean="0"/>
+              <a:rPr lang="hu-HU"/>
               <a:t>Mintaszöveg szerkesztése</a:t>
             </a:r>
           </a:p>
           <a:p>
             <a:pPr lvl="1"/>
             <a:r>
-              <a:rPr lang="hu-HU" smtClean="0"/>
+              <a:rPr lang="hu-HU"/>
               <a:t>Második szint</a:t>
             </a:r>
           </a:p>
           <a:p>
             <a:pPr lvl="2"/>
             <a:r>
-              <a:rPr lang="hu-HU" smtClean="0"/>
+              <a:rPr lang="hu-HU"/>
               <a:t>Harmadik szint</a:t>
             </a:r>
           </a:p>
           <a:p>
             <a:pPr lvl="3"/>
             <a:r>
-              <a:rPr lang="hu-HU" smtClean="0"/>
+              <a:rPr lang="hu-HU"/>
               <a:t>Negyedik szint</a:t>
             </a:r>
           </a:p>
           <a:p>
             <a:pPr lvl="4"/>
             <a:r>
-              <a:rPr lang="hu-HU" smtClean="0"/>
+              <a:rPr lang="hu-HU"/>
               <a:t>Ötödik szint</a:t>
             </a:r>
             <a:endParaRPr lang="en-US" dirty="0"/>
@@ -7645,7 +7645,7 @@
           <a:p>
             <a:fld id="{AE7A1593-58A1-48C6-9761-A5FB4CC6B105}" type="datetimeFigureOut">
               <a:rPr lang="hu-HU" smtClean="0"/>
-              <a:t>2026. 04. 12.</a:t>
+              <a:t>2026. 04. 13.</a:t>
             </a:fld>
             <a:endParaRPr lang="hu-HU"/>
           </a:p>
@@ -7883,7 +7883,7 @@
           <a:lstStyle/>
           <a:p>
             <a:r>
-              <a:rPr lang="hu-HU" smtClean="0"/>
+              <a:rPr lang="hu-HU"/>
               <a:t>Mintacím szerkesztése</a:t>
             </a:r>
             <a:endParaRPr lang="en-US" dirty="0"/>
@@ -7949,7 +7949,7 @@
           <a:p>
             <a:pPr lvl="0"/>
             <a:r>
-              <a:rPr lang="hu-HU" smtClean="0"/>
+              <a:rPr lang="hu-HU"/>
               <a:t>Mintaszöveg szerkesztése</a:t>
             </a:r>
           </a:p>
@@ -7977,35 +7977,35 @@
           <a:p>
             <a:pPr lvl="0"/>
             <a:r>
-              <a:rPr lang="hu-HU" smtClean="0"/>
+              <a:rPr lang="hu-HU"/>
               <a:t>Mintaszöveg szerkesztése</a:t>
             </a:r>
           </a:p>
           <a:p>
             <a:pPr lvl="1"/>
             <a:r>
-              <a:rPr lang="hu-HU" smtClean="0"/>
+              <a:rPr lang="hu-HU"/>
               <a:t>Második szint</a:t>
             </a:r>
           </a:p>
           <a:p>
             <a:pPr lvl="2"/>
             <a:r>
-              <a:rPr lang="hu-HU" smtClean="0"/>
+              <a:rPr lang="hu-HU"/>
               <a:t>Harmadik szint</a:t>
             </a:r>
           </a:p>
           <a:p>
             <a:pPr lvl="3"/>
             <a:r>
-              <a:rPr lang="hu-HU" smtClean="0"/>
+              <a:rPr lang="hu-HU"/>
               <a:t>Negyedik szint</a:t>
             </a:r>
           </a:p>
           <a:p>
             <a:pPr lvl="4"/>
             <a:r>
-              <a:rPr lang="hu-HU" smtClean="0"/>
+              <a:rPr lang="hu-HU"/>
               <a:t>Ötödik szint</a:t>
             </a:r>
             <a:endParaRPr lang="en-US" dirty="0"/>
@@ -8071,7 +8071,7 @@
           <a:p>
             <a:pPr lvl="0"/>
             <a:r>
-              <a:rPr lang="hu-HU" smtClean="0"/>
+              <a:rPr lang="hu-HU"/>
               <a:t>Mintaszöveg szerkesztése</a:t>
             </a:r>
           </a:p>
@@ -8099,35 +8099,35 @@
           <a:p>
             <a:pPr lvl="0"/>
             <a:r>
-              <a:rPr lang="hu-HU" smtClean="0"/>
+              <a:rPr lang="hu-HU"/>
               <a:t>Mintaszöveg szerkesztése</a:t>
             </a:r>
           </a:p>
           <a:p>
             <a:pPr lvl="1"/>
             <a:r>
-              <a:rPr lang="hu-HU" smtClean="0"/>
+              <a:rPr lang="hu-HU"/>
               <a:t>Második szint</a:t>
             </a:r>
           </a:p>
           <a:p>
             <a:pPr lvl="2"/>
             <a:r>
-              <a:rPr lang="hu-HU" smtClean="0"/>
+              <a:rPr lang="hu-HU"/>
               <a:t>Harmadik szint</a:t>
             </a:r>
           </a:p>
           <a:p>
             <a:pPr lvl="3"/>
             <a:r>
-              <a:rPr lang="hu-HU" smtClean="0"/>
+              <a:rPr lang="hu-HU"/>
               <a:t>Negyedik szint</a:t>
             </a:r>
           </a:p>
           <a:p>
             <a:pPr lvl="4"/>
             <a:r>
-              <a:rPr lang="hu-HU" smtClean="0"/>
+              <a:rPr lang="hu-HU"/>
               <a:t>Ötödik szint</a:t>
             </a:r>
             <a:endParaRPr lang="en-US" dirty="0"/>
@@ -8151,7 +8151,7 @@
           <a:p>
             <a:fld id="{AE7A1593-58A1-48C6-9761-A5FB4CC6B105}" type="datetimeFigureOut">
               <a:rPr lang="hu-HU" smtClean="0"/>
-              <a:t>2026. 04. 12.</a:t>
+              <a:t>2026. 04. 13.</a:t>
             </a:fld>
             <a:endParaRPr lang="hu-HU"/>
           </a:p>
@@ -8384,7 +8384,7 @@
           <a:lstStyle/>
           <a:p>
             <a:r>
-              <a:rPr lang="hu-HU" smtClean="0"/>
+              <a:rPr lang="hu-HU"/>
               <a:t>Mintacím szerkesztése</a:t>
             </a:r>
             <a:endParaRPr lang="en-US" dirty="0"/>
@@ -8408,7 +8408,7 @@
           <a:p>
             <a:fld id="{AE7A1593-58A1-48C6-9761-A5FB4CC6B105}" type="datetimeFigureOut">
               <a:rPr lang="hu-HU" smtClean="0"/>
-              <a:t>2026. 04. 12.</a:t>
+              <a:t>2026. 04. 13.</a:t>
             </a:fld>
             <a:endParaRPr lang="hu-HU"/>
           </a:p>
@@ -8571,7 +8571,7 @@
           <a:p>
             <a:fld id="{AE7A1593-58A1-48C6-9761-A5FB4CC6B105}" type="datetimeFigureOut">
               <a:rPr lang="hu-HU" smtClean="0"/>
-              <a:t>2026. 04. 12.</a:t>
+              <a:t>2026. 04. 13.</a:t>
             </a:fld>
             <a:endParaRPr lang="hu-HU"/>
           </a:p>
@@ -8815,7 +8815,7 @@
           </a:lstStyle>
           <a:p>
             <a:r>
-              <a:rPr lang="hu-HU" smtClean="0"/>
+              <a:rPr lang="hu-HU"/>
               <a:t>Mintacím szerkesztése</a:t>
             </a:r>
             <a:endParaRPr lang="en-US" dirty="0"/>
@@ -8844,35 +8844,35 @@
           <a:p>
             <a:pPr lvl="0"/>
             <a:r>
-              <a:rPr lang="hu-HU" smtClean="0"/>
+              <a:rPr lang="hu-HU"/>
               <a:t>Mintaszöveg szerkesztése</a:t>
             </a:r>
           </a:p>
           <a:p>
             <a:pPr lvl="1"/>
             <a:r>
-              <a:rPr lang="hu-HU" smtClean="0"/>
+              <a:rPr lang="hu-HU"/>
               <a:t>Második szint</a:t>
             </a:r>
           </a:p>
           <a:p>
             <a:pPr lvl="2"/>
             <a:r>
-              <a:rPr lang="hu-HU" smtClean="0"/>
+              <a:rPr lang="hu-HU"/>
               <a:t>Harmadik szint</a:t>
             </a:r>
           </a:p>
           <a:p>
             <a:pPr lvl="3"/>
             <a:r>
-              <a:rPr lang="hu-HU" smtClean="0"/>
+              <a:rPr lang="hu-HU"/>
               <a:t>Negyedik szint</a:t>
             </a:r>
           </a:p>
           <a:p>
             <a:pPr lvl="4"/>
             <a:r>
-              <a:rPr lang="hu-HU" smtClean="0"/>
+              <a:rPr lang="hu-HU"/>
               <a:t>Ötödik szint</a:t>
             </a:r>
             <a:endParaRPr lang="en-US" dirty="0"/>
@@ -8938,7 +8938,7 @@
           <a:p>
             <a:pPr lvl="0"/>
             <a:r>
-              <a:rPr lang="hu-HU" smtClean="0"/>
+              <a:rPr lang="hu-HU"/>
               <a:t>Mintaszöveg szerkesztése</a:t>
             </a:r>
           </a:p>
@@ -8961,7 +8961,7 @@
           <a:p>
             <a:fld id="{AE7A1593-58A1-48C6-9761-A5FB4CC6B105}" type="datetimeFigureOut">
               <a:rPr lang="hu-HU" smtClean="0"/>
-              <a:t>2026. 04. 12.</a:t>
+              <a:t>2026. 04. 13.</a:t>
             </a:fld>
             <a:endParaRPr lang="hu-HU"/>
           </a:p>
@@ -9205,7 +9205,7 @@
           </a:lstStyle>
           <a:p>
             <a:r>
-              <a:rPr lang="hu-HU" smtClean="0"/>
+              <a:rPr lang="hu-HU"/>
               <a:t>Mintacím szerkesztése</a:t>
             </a:r>
             <a:endParaRPr lang="en-US" dirty="0"/>
@@ -9281,7 +9281,7 @@
           </a:lstStyle>
           <a:p>
             <a:r>
-              <a:rPr lang="hu-HU" smtClean="0"/>
+              <a:rPr lang="hu-HU"/>
               <a:t>Kép beszúrásához kattintson az ikonra</a:t>
             </a:r>
             <a:endParaRPr lang="en-US" dirty="0"/>
@@ -9347,7 +9347,7 @@
           <a:p>
             <a:pPr lvl="0"/>
             <a:r>
-              <a:rPr lang="hu-HU" smtClean="0"/>
+              <a:rPr lang="hu-HU"/>
               <a:t>Mintaszöveg szerkesztése</a:t>
             </a:r>
           </a:p>
@@ -9370,7 +9370,7 @@
           <a:p>
             <a:fld id="{AE7A1593-58A1-48C6-9761-A5FB4CC6B105}" type="datetimeFigureOut">
               <a:rPr lang="hu-HU" smtClean="0"/>
-              <a:t>2026. 04. 12.</a:t>
+              <a:t>2026. 04. 13.</a:t>
             </a:fld>
             <a:endParaRPr lang="hu-HU"/>
           </a:p>
@@ -9614,7 +9614,7 @@
           </a:lstStyle>
           <a:p>
             <a:r>
-              <a:rPr lang="hu-HU" smtClean="0"/>
+              <a:rPr lang="hu-HU"/>
               <a:t>Mintacím szerkesztése</a:t>
             </a:r>
             <a:endParaRPr lang="en-US" dirty="0"/>
@@ -9690,7 +9690,7 @@
           </a:lstStyle>
           <a:p>
             <a:r>
-              <a:rPr lang="hu-HU" smtClean="0"/>
+              <a:rPr lang="hu-HU"/>
               <a:t>Kép beszúrásához kattintson az ikonra</a:t>
             </a:r>
             <a:endParaRPr lang="en-US" dirty="0"/>
@@ -9756,7 +9756,7 @@
           <a:p>
             <a:pPr lvl="0"/>
             <a:r>
-              <a:rPr lang="hu-HU" smtClean="0"/>
+              <a:rPr lang="hu-HU"/>
               <a:t>Mintaszöveg szerkesztése</a:t>
             </a:r>
           </a:p>
@@ -9779,7 +9779,7 @@
           <a:p>
             <a:fld id="{AE7A1593-58A1-48C6-9761-A5FB4CC6B105}" type="datetimeFigureOut">
               <a:rPr lang="hu-HU" smtClean="0"/>
-              <a:t>2026. 04. 12.</a:t>
+              <a:t>2026. 04. 13.</a:t>
             </a:fld>
             <a:endParaRPr lang="hu-HU"/>
           </a:p>
@@ -10026,7 +10026,7 @@
           </a:lstStyle>
           <a:p>
             <a:r>
-              <a:rPr lang="hu-HU" smtClean="0"/>
+              <a:rPr lang="hu-HU"/>
               <a:t>Mintacím szerkesztése</a:t>
             </a:r>
             <a:endParaRPr lang="en-US" dirty="0"/>
@@ -10092,7 +10092,7 @@
           <a:p>
             <a:pPr lvl="0"/>
             <a:r>
-              <a:rPr lang="hu-HU" smtClean="0"/>
+              <a:rPr lang="hu-HU"/>
               <a:t>Mintaszöveg szerkesztése</a:t>
             </a:r>
           </a:p>
@@ -10115,7 +10115,7 @@
           <a:p>
             <a:fld id="{AE7A1593-58A1-48C6-9761-A5FB4CC6B105}" type="datetimeFigureOut">
               <a:rPr lang="hu-HU" smtClean="0"/>
-              <a:t>2026. 04. 12.</a:t>
+              <a:t>2026. 04. 13.</a:t>
             </a:fld>
             <a:endParaRPr lang="hu-HU"/>
           </a:p>
@@ -10373,7 +10373,7 @@
           <a:p>
             <a:fld id="{AE7A1593-58A1-48C6-9761-A5FB4CC6B105}" type="datetimeFigureOut">
               <a:rPr lang="hu-HU" smtClean="0"/>
-              <a:t>2026. 04. 12.</a:t>
+              <a:t>2026. 04. 13.</a:t>
             </a:fld>
             <a:endParaRPr lang="hu-HU"/>
           </a:p>
@@ -10627,7 +10627,7 @@
           </a:lstStyle>
           <a:p>
             <a:r>
-              <a:rPr lang="hu-HU" smtClean="0"/>
+              <a:rPr lang="hu-HU"/>
               <a:t>Mintacím szerkesztése</a:t>
             </a:r>
             <a:endParaRPr lang="en-US" dirty="0"/>
@@ -10695,7 +10695,7 @@
           <a:p>
             <a:pPr lvl="0"/>
             <a:r>
-              <a:rPr lang="hu-HU" smtClean="0"/>
+              <a:rPr lang="hu-HU"/>
               <a:t>Mintaszöveg szerkesztése</a:t>
             </a:r>
           </a:p>
@@ -10762,7 +10762,7 @@
           <a:p>
             <a:pPr lvl="0"/>
             <a:r>
-              <a:rPr lang="hu-HU" smtClean="0"/>
+              <a:rPr lang="hu-HU"/>
               <a:t>Mintaszöveg szerkesztése</a:t>
             </a:r>
           </a:p>
@@ -10785,7 +10785,7 @@
           <a:p>
             <a:fld id="{AE7A1593-58A1-48C6-9761-A5FB4CC6B105}" type="datetimeFigureOut">
               <a:rPr lang="hu-HU" smtClean="0"/>
-              <a:t>2026. 04. 12.</a:t>
+              <a:t>2026. 04. 13.</a:t>
             </a:fld>
             <a:endParaRPr lang="hu-HU"/>
           </a:p>
@@ -11264,7 +11264,7 @@
           </a:lstStyle>
           <a:p>
             <a:r>
-              <a:rPr lang="hu-HU" smtClean="0"/>
+              <a:rPr lang="hu-HU"/>
               <a:t>Mintacím szerkesztése</a:t>
             </a:r>
             <a:endParaRPr lang="en-US" dirty="0"/>
@@ -11330,7 +11330,7 @@
           <a:p>
             <a:pPr lvl="0"/>
             <a:r>
-              <a:rPr lang="hu-HU" smtClean="0"/>
+              <a:rPr lang="hu-HU"/>
               <a:t>Mintaszöveg szerkesztése</a:t>
             </a:r>
           </a:p>
@@ -11353,7 +11353,7 @@
           <a:p>
             <a:fld id="{AE7A1593-58A1-48C6-9761-A5FB4CC6B105}" type="datetimeFigureOut">
               <a:rPr lang="hu-HU" smtClean="0"/>
-              <a:t>2026. 04. 12.</a:t>
+              <a:t>2026. 04. 13.</a:t>
             </a:fld>
             <a:endParaRPr lang="hu-HU"/>
           </a:p>
@@ -11596,7 +11596,7 @@
           <a:lstStyle/>
           <a:p>
             <a:r>
-              <a:rPr lang="hu-HU" smtClean="0"/>
+              <a:rPr lang="hu-HU"/>
               <a:t>Mintacím szerkesztése</a:t>
             </a:r>
             <a:endParaRPr lang="en-US" dirty="0"/>
@@ -11668,7 +11668,7 @@
           <a:p>
             <a:pPr lvl="0"/>
             <a:r>
-              <a:rPr lang="hu-HU" smtClean="0"/>
+              <a:rPr lang="hu-HU"/>
               <a:t>Mintaszöveg szerkesztése</a:t>
             </a:r>
           </a:p>
@@ -11735,7 +11735,7 @@
           <a:p>
             <a:pPr lvl="0"/>
             <a:r>
-              <a:rPr lang="hu-HU" smtClean="0"/>
+              <a:rPr lang="hu-HU"/>
               <a:t>Mintaszöveg szerkesztése</a:t>
             </a:r>
           </a:p>
@@ -11806,7 +11806,7 @@
           <a:p>
             <a:pPr lvl="0"/>
             <a:r>
-              <a:rPr lang="hu-HU" smtClean="0"/>
+              <a:rPr lang="hu-HU"/>
               <a:t>Mintaszöveg szerkesztése</a:t>
             </a:r>
           </a:p>
@@ -11873,7 +11873,7 @@
           <a:p>
             <a:pPr lvl="0"/>
             <a:r>
-              <a:rPr lang="hu-HU" smtClean="0"/>
+              <a:rPr lang="hu-HU"/>
               <a:t>Mintaszöveg szerkesztése</a:t>
             </a:r>
           </a:p>
@@ -11944,7 +11944,7 @@
           <a:p>
             <a:pPr lvl="0"/>
             <a:r>
-              <a:rPr lang="hu-HU" smtClean="0"/>
+              <a:rPr lang="hu-HU"/>
               <a:t>Mintaszöveg szerkesztése</a:t>
             </a:r>
           </a:p>
@@ -12011,7 +12011,7 @@
           <a:p>
             <a:pPr lvl="0"/>
             <a:r>
-              <a:rPr lang="hu-HU" smtClean="0"/>
+              <a:rPr lang="hu-HU"/>
               <a:t>Mintaszöveg szerkesztése</a:t>
             </a:r>
           </a:p>
@@ -12034,7 +12034,7 @@
           <a:p>
             <a:fld id="{AE7A1593-58A1-48C6-9761-A5FB4CC6B105}" type="datetimeFigureOut">
               <a:rPr lang="hu-HU" smtClean="0"/>
-              <a:t>2026. 04. 12.</a:t>
+              <a:t>2026. 04. 13.</a:t>
             </a:fld>
             <a:endParaRPr lang="hu-HU"/>
           </a:p>
@@ -12272,7 +12272,7 @@
           <a:lstStyle/>
           <a:p>
             <a:r>
-              <a:rPr lang="hu-HU" smtClean="0"/>
+              <a:rPr lang="hu-HU"/>
               <a:t>Mintacím szerkesztése</a:t>
             </a:r>
             <a:endParaRPr lang="en-US" dirty="0"/>
@@ -12344,7 +12344,7 @@
           <a:p>
             <a:pPr lvl="0"/>
             <a:r>
-              <a:rPr lang="hu-HU" smtClean="0"/>
+              <a:rPr lang="hu-HU"/>
               <a:t>Mintaszöveg szerkesztése</a:t>
             </a:r>
           </a:p>
@@ -12422,7 +12422,7 @@
           </a:lstStyle>
           <a:p>
             <a:r>
-              <a:rPr lang="hu-HU" smtClean="0"/>
+              <a:rPr lang="hu-HU"/>
               <a:t>Kép beszúrásához kattintson az ikonra</a:t>
             </a:r>
             <a:endParaRPr lang="en-US" dirty="0"/>
@@ -12490,7 +12490,7 @@
           <a:p>
             <a:pPr lvl="0"/>
             <a:r>
-              <a:rPr lang="hu-HU" smtClean="0"/>
+              <a:rPr lang="hu-HU"/>
               <a:t>Mintaszöveg szerkesztése</a:t>
             </a:r>
           </a:p>
@@ -12561,7 +12561,7 @@
           <a:p>
             <a:pPr lvl="0"/>
             <a:r>
-              <a:rPr lang="hu-HU" smtClean="0"/>
+              <a:rPr lang="hu-HU"/>
               <a:t>Mintaszöveg szerkesztése</a:t>
             </a:r>
           </a:p>
@@ -12639,7 +12639,7 @@
           </a:lstStyle>
           <a:p>
             <a:r>
-              <a:rPr lang="hu-HU" smtClean="0"/>
+              <a:rPr lang="hu-HU"/>
               <a:t>Kép beszúrásához kattintson az ikonra</a:t>
             </a:r>
             <a:endParaRPr lang="en-US" dirty="0"/>
@@ -12707,7 +12707,7 @@
           <a:p>
             <a:pPr lvl="0"/>
             <a:r>
-              <a:rPr lang="hu-HU" smtClean="0"/>
+              <a:rPr lang="hu-HU"/>
               <a:t>Mintaszöveg szerkesztése</a:t>
             </a:r>
           </a:p>
@@ -12778,7 +12778,7 @@
           <a:p>
             <a:pPr lvl="0"/>
             <a:r>
-              <a:rPr lang="hu-HU" smtClean="0"/>
+              <a:rPr lang="hu-HU"/>
               <a:t>Mintaszöveg szerkesztése</a:t>
             </a:r>
           </a:p>
@@ -12856,7 +12856,7 @@
           </a:lstStyle>
           <a:p>
             <a:r>
-              <a:rPr lang="hu-HU" smtClean="0"/>
+              <a:rPr lang="hu-HU"/>
               <a:t>Kép beszúrásához kattintson az ikonra</a:t>
             </a:r>
             <a:endParaRPr lang="en-US" dirty="0"/>
@@ -12924,7 +12924,7 @@
           <a:p>
             <a:pPr lvl="0"/>
             <a:r>
-              <a:rPr lang="hu-HU" smtClean="0"/>
+              <a:rPr lang="hu-HU"/>
               <a:t>Mintaszöveg szerkesztése</a:t>
             </a:r>
           </a:p>
@@ -12947,7 +12947,7 @@
           <a:p>
             <a:fld id="{AE7A1593-58A1-48C6-9761-A5FB4CC6B105}" type="datetimeFigureOut">
               <a:rPr lang="hu-HU" smtClean="0"/>
-              <a:t>2026. 04. 12.</a:t>
+              <a:t>2026. 04. 13.</a:t>
             </a:fld>
             <a:endParaRPr lang="hu-HU"/>
           </a:p>
@@ -13184,7 +13184,7 @@
           </a:lstStyle>
           <a:p>
             <a:r>
-              <a:rPr lang="hu-HU" smtClean="0"/>
+              <a:rPr lang="hu-HU"/>
               <a:t>Mintacím szerkesztése</a:t>
             </a:r>
             <a:endParaRPr lang="en-US" dirty="0"/>
@@ -13208,35 +13208,35 @@
           <a:p>
             <a:pPr lvl="0"/>
             <a:r>
-              <a:rPr lang="hu-HU" smtClean="0"/>
+              <a:rPr lang="hu-HU"/>
               <a:t>Mintaszöveg szerkesztése</a:t>
             </a:r>
           </a:p>
           <a:p>
             <a:pPr lvl="1"/>
             <a:r>
-              <a:rPr lang="hu-HU" smtClean="0"/>
+              <a:rPr lang="hu-HU"/>
               <a:t>Második szint</a:t>
             </a:r>
           </a:p>
           <a:p>
             <a:pPr lvl="2"/>
             <a:r>
-              <a:rPr lang="hu-HU" smtClean="0"/>
+              <a:rPr lang="hu-HU"/>
               <a:t>Harmadik szint</a:t>
             </a:r>
           </a:p>
           <a:p>
             <a:pPr lvl="3"/>
             <a:r>
-              <a:rPr lang="hu-HU" smtClean="0"/>
+              <a:rPr lang="hu-HU"/>
               <a:t>Negyedik szint</a:t>
             </a:r>
           </a:p>
           <a:p>
             <a:pPr lvl="4"/>
             <a:r>
-              <a:rPr lang="hu-HU" smtClean="0"/>
+              <a:rPr lang="hu-HU"/>
               <a:t>Ötödik szint</a:t>
             </a:r>
             <a:endParaRPr lang="en-US" dirty="0"/>
@@ -13260,7 +13260,7 @@
           <a:p>
             <a:fld id="{AE7A1593-58A1-48C6-9761-A5FB4CC6B105}" type="datetimeFigureOut">
               <a:rPr lang="hu-HU" smtClean="0"/>
-              <a:t>2026. 04. 12.</a:t>
+              <a:t>2026. 04. 13.</a:t>
             </a:fld>
             <a:endParaRPr lang="hu-HU"/>
           </a:p>
@@ -13438,7 +13438,7 @@
           <a:lstStyle/>
           <a:p>
             <a:r>
-              <a:rPr lang="hu-HU" smtClean="0"/>
+              <a:rPr lang="hu-HU"/>
               <a:t>Mintacím szerkesztése</a:t>
             </a:r>
             <a:endParaRPr lang="en-US" dirty="0"/>
@@ -13467,35 +13467,35 @@
           <a:p>
             <a:pPr lvl="0"/>
             <a:r>
-              <a:rPr lang="hu-HU" smtClean="0"/>
+              <a:rPr lang="hu-HU"/>
               <a:t>Mintaszöveg szerkesztése</a:t>
             </a:r>
           </a:p>
           <a:p>
             <a:pPr lvl="1"/>
             <a:r>
-              <a:rPr lang="hu-HU" smtClean="0"/>
+              <a:rPr lang="hu-HU"/>
               <a:t>Második szint</a:t>
             </a:r>
           </a:p>
           <a:p>
             <a:pPr lvl="2"/>
             <a:r>
-              <a:rPr lang="hu-HU" smtClean="0"/>
+              <a:rPr lang="hu-HU"/>
               <a:t>Harmadik szint</a:t>
             </a:r>
           </a:p>
           <a:p>
             <a:pPr lvl="3"/>
             <a:r>
-              <a:rPr lang="hu-HU" smtClean="0"/>
+              <a:rPr lang="hu-HU"/>
               <a:t>Negyedik szint</a:t>
             </a:r>
           </a:p>
           <a:p>
             <a:pPr lvl="4"/>
             <a:r>
-              <a:rPr lang="hu-HU" smtClean="0"/>
+              <a:rPr lang="hu-HU"/>
               <a:t>Ötödik szint</a:t>
             </a:r>
             <a:endParaRPr lang="en-US" dirty="0"/>
@@ -13524,7 +13524,7 @@
           <a:p>
             <a:fld id="{AE7A1593-58A1-48C6-9761-A5FB4CC6B105}" type="datetimeFigureOut">
               <a:rPr lang="hu-HU" smtClean="0"/>
-              <a:t>2026. 04. 12.</a:t>
+              <a:t>2026. 04. 13.</a:t>
             </a:fld>
             <a:endParaRPr lang="hu-HU"/>
           </a:p>
@@ -13938,7 +13938,7 @@
           <a:p>
             <a:fld id="{AE7A1593-58A1-48C6-9761-A5FB4CC6B105}" type="datetimeFigureOut">
               <a:rPr lang="hu-HU" smtClean="0"/>
-              <a:t>2026. 04. 12.</a:t>
+              <a:t>2026. 04. 13.</a:t>
             </a:fld>
             <a:endParaRPr lang="hu-HU"/>
           </a:p>
@@ -14079,7 +14079,7 @@
           <a:p>
             <a:fld id="{AE7A1593-58A1-48C6-9761-A5FB4CC6B105}" type="datetimeFigureOut">
               <a:rPr lang="hu-HU" smtClean="0"/>
-              <a:t>2026. 04. 12.</a:t>
+              <a:t>2026. 04. 13.</a:t>
             </a:fld>
             <a:endParaRPr lang="hu-HU"/>
           </a:p>
@@ -14192,7 +14192,7 @@
           <a:p>
             <a:fld id="{AE7A1593-58A1-48C6-9761-A5FB4CC6B105}" type="datetimeFigureOut">
               <a:rPr lang="hu-HU" smtClean="0"/>
-              <a:t>2026. 04. 12.</a:t>
+              <a:t>2026. 04. 13.</a:t>
             </a:fld>
             <a:endParaRPr lang="hu-HU"/>
           </a:p>
@@ -14503,7 +14503,7 @@
           <a:p>
             <a:fld id="{AE7A1593-58A1-48C6-9761-A5FB4CC6B105}" type="datetimeFigureOut">
               <a:rPr lang="hu-HU" smtClean="0"/>
-              <a:t>2026. 04. 12.</a:t>
+              <a:t>2026. 04. 13.</a:t>
             </a:fld>
             <a:endParaRPr lang="hu-HU"/>
           </a:p>
@@ -14791,7 +14791,7 @@
           <a:p>
             <a:fld id="{AE7A1593-58A1-48C6-9761-A5FB4CC6B105}" type="datetimeFigureOut">
               <a:rPr lang="hu-HU" smtClean="0"/>
-              <a:t>2026. 04. 12.</a:t>
+              <a:t>2026. 04. 13.</a:t>
             </a:fld>
             <a:endParaRPr lang="hu-HU"/>
           </a:p>
@@ -15041,7 +15041,7 @@
           <a:p>
             <a:fld id="{AE7A1593-58A1-48C6-9761-A5FB4CC6B105}" type="datetimeFigureOut">
               <a:rPr lang="hu-HU" smtClean="0"/>
-              <a:t>2026. 04. 12.</a:t>
+              <a:t>2026. 04. 13.</a:t>
             </a:fld>
             <a:endParaRPr lang="hu-HU"/>
           </a:p>
@@ -15496,7 +15496,7 @@
           <a:lstStyle/>
           <a:p>
             <a:r>
-              <a:rPr lang="hu-HU" smtClean="0"/>
+              <a:rPr lang="hu-HU"/>
               <a:t>Mintacím szerkesztése</a:t>
             </a:r>
             <a:endParaRPr lang="en-US" dirty="0"/>
@@ -15537,35 +15537,35 @@
           <a:p>
             <a:pPr lvl="0"/>
             <a:r>
-              <a:rPr lang="hu-HU" smtClean="0"/>
+              <a:rPr lang="hu-HU"/>
               <a:t>Mintaszöveg szerkesztése</a:t>
             </a:r>
           </a:p>
           <a:p>
             <a:pPr lvl="1"/>
             <a:r>
-              <a:rPr lang="hu-HU" smtClean="0"/>
+              <a:rPr lang="hu-HU"/>
               <a:t>Második szint</a:t>
             </a:r>
           </a:p>
           <a:p>
             <a:pPr lvl="2"/>
             <a:r>
-              <a:rPr lang="hu-HU" smtClean="0"/>
+              <a:rPr lang="hu-HU"/>
               <a:t>Harmadik szint</a:t>
             </a:r>
           </a:p>
           <a:p>
             <a:pPr lvl="3"/>
             <a:r>
-              <a:rPr lang="hu-HU" smtClean="0"/>
+              <a:rPr lang="hu-HU"/>
               <a:t>Negyedik szint</a:t>
             </a:r>
           </a:p>
           <a:p>
             <a:pPr lvl="4"/>
             <a:r>
-              <a:rPr lang="hu-HU" smtClean="0"/>
+              <a:rPr lang="hu-HU"/>
               <a:t>Ötödik szint</a:t>
             </a:r>
             <a:endParaRPr lang="en-US" dirty="0"/>
@@ -15614,7 +15614,7 @@
           <a:p>
             <a:fld id="{AE7A1593-58A1-48C6-9761-A5FB4CC6B105}" type="datetimeFigureOut">
               <a:rPr lang="hu-HU" smtClean="0"/>
-              <a:t>2026. 04. 12.</a:t>
+              <a:t>2026. 04. 13.</a:t>
             </a:fld>
             <a:endParaRPr lang="hu-HU"/>
           </a:p>
@@ -16350,7 +16350,7 @@
           <a:lstStyle/>
           <a:p>
             <a:r>
-              <a:rPr lang="hu-HU" smtClean="0"/>
+              <a:rPr lang="hu-HU"/>
               <a:t>Mintacím szerkesztése</a:t>
             </a:r>
             <a:endParaRPr lang="en-US" dirty="0"/>
@@ -16384,35 +16384,35 @@
           <a:p>
             <a:pPr lvl="0"/>
             <a:r>
-              <a:rPr lang="hu-HU" smtClean="0"/>
+              <a:rPr lang="hu-HU"/>
               <a:t>Mintaszöveg szerkesztése</a:t>
             </a:r>
           </a:p>
           <a:p>
             <a:pPr lvl="1"/>
             <a:r>
-              <a:rPr lang="hu-HU" smtClean="0"/>
+              <a:rPr lang="hu-HU"/>
               <a:t>Második szint</a:t>
             </a:r>
           </a:p>
           <a:p>
             <a:pPr lvl="2"/>
             <a:r>
-              <a:rPr lang="hu-HU" smtClean="0"/>
+              <a:rPr lang="hu-HU"/>
               <a:t>Harmadik szint</a:t>
             </a:r>
           </a:p>
           <a:p>
             <a:pPr lvl="3"/>
             <a:r>
-              <a:rPr lang="hu-HU" smtClean="0"/>
+              <a:rPr lang="hu-HU"/>
               <a:t>Negyedik szint</a:t>
             </a:r>
           </a:p>
           <a:p>
             <a:pPr lvl="4"/>
             <a:r>
-              <a:rPr lang="hu-HU" smtClean="0"/>
+              <a:rPr lang="hu-HU"/>
               <a:t>Ötödik szint</a:t>
             </a:r>
             <a:endParaRPr lang="en-US" dirty="0"/>
@@ -16454,7 +16454,7 @@
           <a:p>
             <a:fld id="{AE7A1593-58A1-48C6-9761-A5FB4CC6B105}" type="datetimeFigureOut">
               <a:rPr lang="hu-HU" smtClean="0"/>
-              <a:t>2026. 04. 12.</a:t>
+              <a:t>2026. 04. 13.</a:t>
             </a:fld>
             <a:endParaRPr lang="hu-HU"/>
           </a:p>
@@ -16894,7 +16894,7 @@
           <a:lstStyle/>
           <a:p>
             <a:r>
-              <a:rPr lang="hu-HU" b="1" dirty="0" smtClean="0">
+              <a:rPr lang="hu-HU" b="1" dirty="0">
                 <a:solidFill>
                   <a:schemeClr val="bg1"/>
                 </a:solidFill>
@@ -16904,7 +16904,7 @@
               <a:t>1987-es pizzéria </a:t>
             </a:r>
             <a:br>
-              <a:rPr lang="hu-HU" b="1" dirty="0" smtClean="0">
+              <a:rPr lang="hu-HU" b="1" dirty="0">
                 <a:solidFill>
                   <a:schemeClr val="bg1"/>
                 </a:solidFill>
@@ -16913,7 +16913,7 @@
               </a:rPr>
             </a:br>
             <a:r>
-              <a:rPr lang="hu-HU" b="1" dirty="0" smtClean="0">
+              <a:rPr lang="hu-HU" b="1" dirty="0">
                 <a:solidFill>
                   <a:schemeClr val="bg1"/>
                 </a:solidFill>
@@ -16929,20 +16929,6 @@
               </a:rPr>
               <a:t>vizsgaremek</a:t>
             </a:r>
-            <a:endParaRPr lang="hu-HU" b="1" dirty="0">
-              <a:solidFill>
-                <a:schemeClr val="bg1"/>
-              </a:solidFill>
-              <a:effectLst>
-                <a:outerShdw blurRad="38100" dist="38100" dir="2700000" algn="tl">
-                  <a:srgbClr val="000000">
-                    <a:alpha val="43137"/>
-                  </a:srgbClr>
-                </a:outerShdw>
-              </a:effectLst>
-              <a:latin typeface="Times New Roman" panose="02020603050405020304" pitchFamily="18" charset="0"/>
-              <a:cs typeface="Times New Roman" panose="02020603050405020304" pitchFamily="18" charset="0"/>
-            </a:endParaRPr>
           </a:p>
         </p:txBody>
       </p:sp>
@@ -16964,7 +16950,7 @@
         </p:nvSpPr>
         <p:spPr>
           <a:xfrm>
-            <a:off x="1524000" y="4719075"/>
+            <a:off x="1524000" y="4710197"/>
             <a:ext cx="9144000" cy="1655762"/>
           </a:xfrm>
         </p:spPr>
@@ -16980,47 +16966,7 @@
                 <a:latin typeface="Times New Roman" panose="02020603050405020304" pitchFamily="18" charset="0"/>
                 <a:cs typeface="Times New Roman" panose="02020603050405020304" pitchFamily="18" charset="0"/>
               </a:rPr>
-              <a:t>Drahovszky </a:t>
-            </a:r>
-            <a:r>
-              <a:rPr lang="hu-HU" dirty="0" smtClean="0">
-                <a:solidFill>
-                  <a:schemeClr val="bg1"/>
-                </a:solidFill>
-                <a:latin typeface="Times New Roman" panose="02020603050405020304" pitchFamily="18" charset="0"/>
-                <a:cs typeface="Times New Roman" panose="02020603050405020304" pitchFamily="18" charset="0"/>
-              </a:rPr>
-              <a:t>Márk</a:t>
-            </a:r>
-            <a:r>
-              <a:rPr lang="hu-HU" dirty="0">
-                <a:solidFill>
-                  <a:schemeClr val="bg1"/>
-                </a:solidFill>
-                <a:latin typeface="Times New Roman" panose="02020603050405020304" pitchFamily="18" charset="0"/>
-                <a:cs typeface="Times New Roman" panose="02020603050405020304" pitchFamily="18" charset="0"/>
-              </a:rPr>
-              <a:t> </a:t>
-            </a:r>
-            <a:r>
-              <a:rPr lang="hu-HU" dirty="0" smtClean="0">
-                <a:solidFill>
-                  <a:schemeClr val="bg1"/>
-                </a:solidFill>
-                <a:latin typeface="Times New Roman" panose="02020603050405020304" pitchFamily="18" charset="0"/>
-                <a:cs typeface="Times New Roman" panose="02020603050405020304" pitchFamily="18" charset="0"/>
-              </a:rPr>
-              <a:t>és </a:t>
-            </a:r>
-            <a:r>
-              <a:rPr lang="hu-HU" dirty="0" smtClean="0">
-                <a:solidFill>
-                  <a:schemeClr val="bg1"/>
-                </a:solidFill>
-                <a:latin typeface="Times New Roman" panose="02020603050405020304" pitchFamily="18" charset="0"/>
-                <a:cs typeface="Times New Roman" panose="02020603050405020304" pitchFamily="18" charset="0"/>
-              </a:rPr>
-              <a:t>Remete Marcell Róbert által</a:t>
+              <a:t>Remete Marcell Róbert és Drahovszky Márk által</a:t>
             </a:r>
           </a:p>
           <a:p>
@@ -17281,7 +17227,7 @@
           <a:lstStyle/>
           <a:p>
             <a:r>
-              <a:rPr lang="hu-HU" dirty="0" err="1" smtClean="0">
+              <a:rPr lang="hu-HU" dirty="0" err="1">
                 <a:solidFill>
                   <a:schemeClr val="bg1"/>
                 </a:solidFill>
@@ -17319,7 +17265,7 @@
               <a:buNone/>
             </a:pPr>
             <a:r>
-              <a:rPr lang="hu-HU" dirty="0" smtClean="0">
+              <a:rPr lang="hu-HU" dirty="0">
                 <a:solidFill>
                   <a:schemeClr val="bg1"/>
                 </a:solidFill>
@@ -17329,7 +17275,7 @@
               <a:t>-Pontosabban </a:t>
             </a:r>
             <a:r>
-              <a:rPr lang="hu-HU" dirty="0" err="1" smtClean="0">
+              <a:rPr lang="hu-HU" dirty="0" err="1">
                 <a:solidFill>
                   <a:schemeClr val="bg1"/>
                 </a:solidFill>
@@ -17339,7 +17285,7 @@
               <a:t>Bootstrap</a:t>
             </a:r>
             <a:r>
-              <a:rPr lang="hu-HU" dirty="0" smtClean="0">
+              <a:rPr lang="hu-HU" dirty="0">
                 <a:solidFill>
                   <a:schemeClr val="bg1"/>
                 </a:solidFill>
@@ -17354,7 +17300,7 @@
               <a:buNone/>
             </a:pPr>
             <a:r>
-              <a:rPr lang="hu-HU" dirty="0" smtClean="0">
+              <a:rPr lang="hu-HU" dirty="0">
                 <a:solidFill>
                   <a:schemeClr val="bg1"/>
                 </a:solidFill>
@@ -17364,7 +17310,7 @@
               <a:t>-Főoldalon segíti a </a:t>
             </a:r>
             <a:r>
-              <a:rPr lang="hu-HU" dirty="0" err="1" smtClean="0">
+              <a:rPr lang="hu-HU" dirty="0" err="1">
                 <a:solidFill>
                   <a:schemeClr val="bg1"/>
                 </a:solidFill>
@@ -17374,7 +17320,7 @@
               <a:t>reszponzivitást</a:t>
             </a:r>
             <a:r>
-              <a:rPr lang="hu-HU" dirty="0" smtClean="0">
+              <a:rPr lang="hu-HU" dirty="0">
                 <a:solidFill>
                   <a:schemeClr val="bg1"/>
                 </a:solidFill>
@@ -17401,7 +17347,7 @@
               <a:buNone/>
             </a:pPr>
             <a:r>
-              <a:rPr lang="hu-HU" dirty="0" smtClean="0">
+              <a:rPr lang="hu-HU" dirty="0">
                 <a:solidFill>
                   <a:schemeClr val="bg1"/>
                 </a:solidFill>
@@ -17410,13 +17356,6 @@
               </a:rPr>
               <a:t>Nagyban belesegített a program fejlesztéséhez a következő szintre</a:t>
             </a:r>
-            <a:endParaRPr lang="hu-HU" dirty="0">
-              <a:solidFill>
-                <a:schemeClr val="bg1"/>
-              </a:solidFill>
-              <a:latin typeface="Times New Roman" panose="02020603050405020304" pitchFamily="18" charset="0"/>
-              <a:cs typeface="Times New Roman" panose="02020603050405020304" pitchFamily="18" charset="0"/>
-            </a:endParaRPr>
           </a:p>
         </p:txBody>
       </p:sp>
@@ -17433,13 +17372,6 @@
   <p:transition spd="slow">
     <p:comb/>
   </p:transition>
-  <p:timing>
-    <p:tnLst>
-      <p:par>
-        <p:cTn id="1" dur="indefinite" restart="never" nodeType="tmRoot"/>
-      </p:par>
-    </p:tnLst>
-  </p:timing>
 </p:sld>
 </file>
 
@@ -17505,7 +17437,7 @@
           <a:lstStyle/>
           <a:p>
             <a:r>
-              <a:rPr lang="hu-HU" dirty="0" err="1" smtClean="0">
+              <a:rPr lang="hu-HU" dirty="0" err="1">
                 <a:solidFill>
                   <a:schemeClr val="tx1"/>
                 </a:solidFill>
@@ -17515,7 +17447,7 @@
               <a:t>Bootstrap</a:t>
             </a:r>
             <a:r>
-              <a:rPr lang="hu-HU" dirty="0" smtClean="0">
+              <a:rPr lang="hu-HU" dirty="0">
                 <a:solidFill>
                   <a:schemeClr val="tx1"/>
                 </a:solidFill>
@@ -17524,13 +17456,6 @@
               </a:rPr>
               <a:t> kód</a:t>
             </a:r>
-            <a:endParaRPr lang="hu-HU" dirty="0">
-              <a:solidFill>
-                <a:schemeClr val="tx1"/>
-              </a:solidFill>
-              <a:latin typeface="Times New Roman" panose="02020603050405020304" pitchFamily="18" charset="0"/>
-              <a:cs typeface="Times New Roman" panose="02020603050405020304" pitchFamily="18" charset="0"/>
-            </a:endParaRPr>
           </a:p>
         </p:txBody>
       </p:sp>
@@ -17544,25 +17469,18 @@
   <p:clrMapOvr>
     <a:masterClrMapping/>
   </p:clrMapOvr>
-  <mc:AlternateContent xmlns:mc="http://schemas.openxmlformats.org/markup-compatibility/2006">
-    <mc:Choice xmlns:p14="http://schemas.microsoft.com/office/powerpoint/2010/main" Requires="p14">
+  <mc:AlternateContent xmlns:mc="http://schemas.openxmlformats.org/markup-compatibility/2006" xmlns:p14="http://schemas.microsoft.com/office/powerpoint/2010/main">
+    <mc:Choice Requires="p14">
       <p:transition spd="med" p14:dur="700">
         <p:fade/>
       </p:transition>
     </mc:Choice>
-    <mc:Fallback>
+    <mc:Fallback xmlns="">
       <p:transition spd="med">
         <p:fade/>
       </p:transition>
     </mc:Fallback>
   </mc:AlternateContent>
-  <p:timing>
-    <p:tnLst>
-      <p:par>
-        <p:cTn id="1" dur="indefinite" restart="never" nodeType="tmRoot"/>
-      </p:par>
-    </p:tnLst>
-  </p:timing>
 </p:sld>
 </file>
 
@@ -17641,32 +17559,15 @@
                 <a:latin typeface="Times New Roman" panose="02020603050405020304" pitchFamily="18" charset="0"/>
                 <a:cs typeface="Times New Roman" panose="02020603050405020304" pitchFamily="18" charset="0"/>
               </a:rPr>
-              <a:t>Rengeteg külön PHP fájl igénybe lett </a:t>
-            </a:r>
-            <a:r>
-              <a:rPr lang="hu-HU" dirty="0" smtClean="0">
-                <a:solidFill>
-                  <a:schemeClr val="bg1"/>
-                </a:solidFill>
-                <a:latin typeface="Times New Roman" panose="02020603050405020304" pitchFamily="18" charset="0"/>
-                <a:cs typeface="Times New Roman" panose="02020603050405020304" pitchFamily="18" charset="0"/>
-              </a:rPr>
-              <a:t>véve, használatok:</a:t>
-            </a:r>
-            <a:endParaRPr lang="hu-HU" dirty="0">
-              <a:solidFill>
-                <a:schemeClr val="bg1"/>
-              </a:solidFill>
-              <a:latin typeface="Times New Roman" panose="02020603050405020304" pitchFamily="18" charset="0"/>
-              <a:cs typeface="Times New Roman" panose="02020603050405020304" pitchFamily="18" charset="0"/>
-            </a:endParaRPr>
+              <a:t>Rengeteg külön PHP fájl igénybe lett véve, használatok:</a:t>
+            </a:r>
           </a:p>
           <a:p>
             <a:pPr marL="0" indent="0">
               <a:buNone/>
             </a:pPr>
             <a:r>
-              <a:rPr lang="hu-HU" dirty="0" smtClean="0">
+              <a:rPr lang="hu-HU" dirty="0">
                 <a:solidFill>
                   <a:schemeClr val="bg1"/>
                 </a:solidFill>
@@ -17681,7 +17582,7 @@
               <a:buNone/>
             </a:pPr>
             <a:r>
-              <a:rPr lang="hu-HU" dirty="0" smtClean="0">
+              <a:rPr lang="hu-HU" dirty="0">
                 <a:solidFill>
                   <a:schemeClr val="bg1"/>
                 </a:solidFill>
@@ -17696,7 +17597,7 @@
               <a:buNone/>
             </a:pPr>
             <a:r>
-              <a:rPr lang="hu-HU" dirty="0" smtClean="0">
+              <a:rPr lang="hu-HU" dirty="0">
                 <a:solidFill>
                   <a:schemeClr val="bg1"/>
                 </a:solidFill>
@@ -17706,7 +17607,7 @@
               <a:t>-</a:t>
             </a:r>
             <a:r>
-              <a:rPr lang="hu-HU" dirty="0" err="1" smtClean="0">
+              <a:rPr lang="hu-HU" dirty="0" err="1">
                 <a:solidFill>
                   <a:schemeClr val="bg1"/>
                 </a:solidFill>
@@ -17716,7 +17617,7 @@
               <a:t>Admin</a:t>
             </a:r>
             <a:r>
-              <a:rPr lang="hu-HU" dirty="0" smtClean="0">
+              <a:rPr lang="hu-HU" dirty="0">
                 <a:solidFill>
                   <a:schemeClr val="bg1"/>
                 </a:solidFill>
@@ -17738,17 +17639,7 @@
                 <a:latin typeface="Times New Roman" panose="02020603050405020304" pitchFamily="18" charset="0"/>
                 <a:cs typeface="Times New Roman" panose="02020603050405020304" pitchFamily="18" charset="0"/>
               </a:rPr>
-              <a:t>	</a:t>
-            </a:r>
-            <a:r>
-              <a:rPr lang="hu-HU" dirty="0" smtClean="0">
-                <a:solidFill>
-                  <a:schemeClr val="bg1"/>
-                </a:solidFill>
-                <a:latin typeface="Times New Roman" panose="02020603050405020304" pitchFamily="18" charset="0"/>
-                <a:cs typeface="Times New Roman" panose="02020603050405020304" pitchFamily="18" charset="0"/>
-              </a:rPr>
-              <a:t>-&gt;Ellenőrizni tudja a felhasználó jogát és állapotát</a:t>
+              <a:t>	-&gt;Ellenőrizni tudja a felhasználó jogát és állapotát</a:t>
             </a:r>
           </a:p>
           <a:p>
@@ -17767,7 +17658,7 @@
             <a:pPr marL="0" indent="0">
               <a:buNone/>
             </a:pPr>
-            <a:endParaRPr lang="hu-HU" dirty="0" smtClean="0">
+            <a:endParaRPr lang="hu-HU" dirty="0">
               <a:solidFill>
                 <a:schemeClr val="bg1"/>
               </a:solidFill>
@@ -17780,7 +17671,7 @@
               <a:buNone/>
             </a:pPr>
             <a:r>
-              <a:rPr lang="hu-HU" i="1" dirty="0" smtClean="0">
+              <a:rPr lang="hu-HU" i="1" dirty="0">
                 <a:solidFill>
                   <a:schemeClr val="bg1"/>
                 </a:solidFill>
@@ -17789,13 +17680,6 @@
               </a:rPr>
               <a:t>Egyéb PHP használatok…</a:t>
             </a:r>
-            <a:endParaRPr lang="hu-HU" i="1" dirty="0">
-              <a:solidFill>
-                <a:schemeClr val="bg1"/>
-              </a:solidFill>
-              <a:latin typeface="Times New Roman" panose="02020603050405020304" pitchFamily="18" charset="0"/>
-              <a:cs typeface="Times New Roman" panose="02020603050405020304" pitchFamily="18" charset="0"/>
-            </a:endParaRPr>
           </a:p>
         </p:txBody>
       </p:sp>
@@ -17812,13 +17696,6 @@
   <p:transition spd="slow">
     <p:comb/>
   </p:transition>
-  <p:timing>
-    <p:tnLst>
-      <p:par>
-        <p:cTn id="1" dur="indefinite" restart="never" nodeType="tmRoot"/>
-      </p:par>
-    </p:tnLst>
-  </p:timing>
 </p:sld>
 </file>
 
@@ -17855,7 +17732,7 @@
           <a:lstStyle/>
           <a:p>
             <a:r>
-              <a:rPr lang="hu-HU" dirty="0" smtClean="0">
+              <a:rPr lang="hu-HU" dirty="0">
                 <a:solidFill>
                   <a:schemeClr val="tx1"/>
                 </a:solidFill>
@@ -17865,7 +17742,7 @@
               <a:t>PHP hozzácsatolása a </a:t>
             </a:r>
             <a:r>
-              <a:rPr lang="hu-HU" dirty="0" err="1" smtClean="0">
+              <a:rPr lang="hu-HU" dirty="0" err="1">
                 <a:solidFill>
                   <a:schemeClr val="tx1"/>
                 </a:solidFill>
@@ -17918,25 +17795,18 @@
   <p:clrMapOvr>
     <a:masterClrMapping/>
   </p:clrMapOvr>
-  <mc:AlternateContent xmlns:mc="http://schemas.openxmlformats.org/markup-compatibility/2006">
-    <mc:Choice xmlns:p14="http://schemas.microsoft.com/office/powerpoint/2010/main" Requires="p14">
+  <mc:AlternateContent xmlns:mc="http://schemas.openxmlformats.org/markup-compatibility/2006" xmlns:p14="http://schemas.microsoft.com/office/powerpoint/2010/main">
+    <mc:Choice Requires="p14">
       <p:transition spd="med" p14:dur="700">
         <p:fade/>
       </p:transition>
     </mc:Choice>
-    <mc:Fallback>
+    <mc:Fallback xmlns="">
       <p:transition spd="med">
         <p:fade/>
       </p:transition>
     </mc:Fallback>
   </mc:AlternateContent>
-  <p:timing>
-    <p:tnLst>
-      <p:par>
-        <p:cTn id="1" dur="indefinite" restart="never" nodeType="tmRoot"/>
-      </p:par>
-    </p:tnLst>
-  </p:timing>
 </p:sld>
 </file>
 
@@ -17973,7 +17843,7 @@
           <a:lstStyle/>
           <a:p>
             <a:r>
-              <a:rPr lang="hu-HU" dirty="0" smtClean="0">
+              <a:rPr lang="hu-HU" dirty="0">
                 <a:solidFill>
                   <a:schemeClr val="bg1"/>
                 </a:solidFill>
@@ -18008,7 +17878,7 @@
               <a:buNone/>
             </a:pPr>
             <a:r>
-              <a:rPr lang="hu-HU" dirty="0" smtClean="0">
+              <a:rPr lang="hu-HU" dirty="0">
                 <a:solidFill>
                   <a:schemeClr val="bg1"/>
                 </a:solidFill>
@@ -18023,7 +17893,7 @@
               <a:buNone/>
             </a:pPr>
             <a:r>
-              <a:rPr lang="hu-HU" dirty="0" smtClean="0">
+              <a:rPr lang="hu-HU" dirty="0">
                 <a:solidFill>
                   <a:schemeClr val="bg1"/>
                 </a:solidFill>
@@ -18038,7 +17908,7 @@
               <a:buNone/>
             </a:pPr>
             <a:r>
-              <a:rPr lang="hu-HU" dirty="0" smtClean="0">
+              <a:rPr lang="hu-HU" dirty="0">
                 <a:solidFill>
                   <a:schemeClr val="bg1"/>
                 </a:solidFill>
@@ -18053,7 +17923,7 @@
               <a:buNone/>
             </a:pPr>
             <a:r>
-              <a:rPr lang="hu-HU" dirty="0" smtClean="0">
+              <a:rPr lang="hu-HU" dirty="0">
                 <a:solidFill>
                   <a:schemeClr val="bg1"/>
                 </a:solidFill>
@@ -18068,7 +17938,7 @@
               <a:buNone/>
             </a:pPr>
             <a:r>
-              <a:rPr lang="hu-HU" dirty="0" smtClean="0">
+              <a:rPr lang="hu-HU" dirty="0">
                 <a:solidFill>
                   <a:schemeClr val="bg1"/>
                 </a:solidFill>
@@ -18083,7 +17953,7 @@
               <a:buNone/>
             </a:pPr>
             <a:r>
-              <a:rPr lang="hu-HU" i="1" dirty="0" smtClean="0">
+              <a:rPr lang="hu-HU" dirty="0">
                 <a:solidFill>
                   <a:schemeClr val="bg1"/>
                 </a:solidFill>
@@ -18092,13 +17962,6 @@
               </a:rPr>
               <a:t>-Egyedi pizza készítő</a:t>
             </a:r>
-            <a:endParaRPr lang="hu-HU" i="1" dirty="0">
-              <a:solidFill>
-                <a:schemeClr val="bg1"/>
-              </a:solidFill>
-              <a:latin typeface="Times New Roman" panose="02020603050405020304" pitchFamily="18" charset="0"/>
-              <a:cs typeface="Times New Roman" panose="02020603050405020304" pitchFamily="18" charset="0"/>
-            </a:endParaRPr>
           </a:p>
         </p:txBody>
       </p:sp>
@@ -18139,13 +18002,6 @@
   <p:transition spd="slow">
     <p:comb/>
   </p:transition>
-  <p:timing>
-    <p:tnLst>
-      <p:par>
-        <p:cTn id="1" dur="indefinite" restart="never" nodeType="tmRoot"/>
-      </p:par>
-    </p:tnLst>
-  </p:timing>
 </p:sld>
 </file>
 
@@ -18182,7 +18038,7 @@
           <a:lstStyle/>
           <a:p>
             <a:r>
-              <a:rPr lang="hu-HU" dirty="0" err="1" smtClean="0">
+              <a:rPr lang="hu-HU" dirty="0" err="1">
                 <a:solidFill>
                   <a:schemeClr val="bg1"/>
                 </a:solidFill>
@@ -18192,16 +18048,6 @@
               <a:t>Továbbfejlesztési</a:t>
             </a:r>
             <a:r>
-              <a:rPr lang="hu-HU" dirty="0" smtClean="0">
-                <a:solidFill>
-                  <a:schemeClr val="bg1"/>
-                </a:solidFill>
-                <a:latin typeface="Times New Roman" panose="02020603050405020304" pitchFamily="18" charset="0"/>
-                <a:cs typeface="Times New Roman" panose="02020603050405020304" pitchFamily="18" charset="0"/>
-              </a:rPr>
-              <a:t> lehetőségek (bővítés/</a:t>
-            </a:r>
-            <a:r>
               <a:rPr lang="hu-HU" dirty="0">
                 <a:solidFill>
                   <a:schemeClr val="bg1"/>
@@ -18209,25 +18055,8 @@
                 <a:latin typeface="Times New Roman" panose="02020603050405020304" pitchFamily="18" charset="0"/>
                 <a:cs typeface="Times New Roman" panose="02020603050405020304" pitchFamily="18" charset="0"/>
               </a:rPr>
-              <a:t>fejlesztés</a:t>
-            </a:r>
-            <a:r>
-              <a:rPr lang="hu-HU" dirty="0" smtClean="0">
-                <a:solidFill>
-                  <a:schemeClr val="bg1"/>
-                </a:solidFill>
-                <a:latin typeface="Times New Roman" panose="02020603050405020304" pitchFamily="18" charset="0"/>
-                <a:cs typeface="Times New Roman" panose="02020603050405020304" pitchFamily="18" charset="0"/>
-              </a:rPr>
-              <a:t>)</a:t>
-            </a:r>
-            <a:endParaRPr lang="hu-HU" dirty="0">
-              <a:solidFill>
-                <a:schemeClr val="bg1"/>
-              </a:solidFill>
-              <a:latin typeface="Times New Roman" panose="02020603050405020304" pitchFamily="18" charset="0"/>
-              <a:cs typeface="Times New Roman" panose="02020603050405020304" pitchFamily="18" charset="0"/>
-            </a:endParaRPr>
+              <a:t> lehetőségek (bővítés/fejlesztés)</a:t>
+            </a:r>
           </a:p>
         </p:txBody>
       </p:sp>
@@ -18255,7 +18084,7 @@
               <a:buNone/>
             </a:pPr>
             <a:r>
-              <a:rPr lang="hu-HU" dirty="0" smtClean="0">
+              <a:rPr lang="hu-HU" dirty="0">
                 <a:solidFill>
                   <a:schemeClr val="bg1"/>
                 </a:solidFill>
@@ -18270,7 +18099,7 @@
               <a:buNone/>
             </a:pPr>
             <a:r>
-              <a:rPr lang="hu-HU" dirty="0" smtClean="0">
+              <a:rPr lang="hu-HU" dirty="0">
                 <a:solidFill>
                   <a:schemeClr val="bg1"/>
                 </a:solidFill>
@@ -18285,7 +18114,7 @@
               <a:buNone/>
             </a:pPr>
             <a:r>
-              <a:rPr lang="hu-HU" dirty="0" smtClean="0">
+              <a:rPr lang="hu-HU" dirty="0">
                 <a:solidFill>
                   <a:schemeClr val="bg1"/>
                 </a:solidFill>
@@ -18300,7 +18129,7 @@
               <a:buNone/>
             </a:pPr>
             <a:r>
-              <a:rPr lang="hu-HU" dirty="0" smtClean="0">
+              <a:rPr lang="hu-HU" dirty="0">
                 <a:solidFill>
                   <a:schemeClr val="bg1"/>
                 </a:solidFill>
@@ -18315,7 +18144,7 @@
               <a:buNone/>
             </a:pPr>
             <a:r>
-              <a:rPr lang="hu-HU" i="1" dirty="0" smtClean="0">
+              <a:rPr lang="hu-HU" i="1" dirty="0">
                 <a:solidFill>
                   <a:schemeClr val="bg1"/>
                 </a:solidFill>
@@ -18324,13 +18153,6 @@
               </a:rPr>
               <a:t>-Egyéb, szinte végtelen lehetőségek…</a:t>
             </a:r>
-            <a:endParaRPr lang="hu-HU" i="1" dirty="0">
-              <a:solidFill>
-                <a:schemeClr val="bg1"/>
-              </a:solidFill>
-              <a:latin typeface="Times New Roman" panose="02020603050405020304" pitchFamily="18" charset="0"/>
-              <a:cs typeface="Times New Roman" panose="02020603050405020304" pitchFamily="18" charset="0"/>
-            </a:endParaRPr>
           </a:p>
         </p:txBody>
       </p:sp>
@@ -18344,25 +18166,18 @@
   <p:clrMapOvr>
     <a:masterClrMapping/>
   </p:clrMapOvr>
-  <mc:AlternateContent xmlns:mc="http://schemas.openxmlformats.org/markup-compatibility/2006">
-    <mc:Choice xmlns:p15="http://schemas.microsoft.com/office/powerpoint/2012/main" Requires="p15">
+  <mc:AlternateContent xmlns:mc="http://schemas.openxmlformats.org/markup-compatibility/2006" xmlns:p15="http://schemas.microsoft.com/office/powerpoint/2012/main">
+    <mc:Choice Requires="p15">
       <p:transition xmlns:p14="http://schemas.microsoft.com/office/powerpoint/2010/main" spd="slow" p14:dur="1250">
         <p15:prstTrans prst="pageCurlDouble"/>
       </p:transition>
     </mc:Choice>
-    <mc:Fallback>
+    <mc:Fallback xmlns="">
       <p:transition spd="slow">
         <p:fade/>
       </p:transition>
     </mc:Fallback>
   </mc:AlternateContent>
-  <p:timing>
-    <p:tnLst>
-      <p:par>
-        <p:cTn id="1" dur="indefinite" restart="never" nodeType="tmRoot"/>
-      </p:par>
-    </p:tnLst>
-  </p:timing>
 </p:sld>
 </file>
 
@@ -18399,16 +18214,12 @@
           <a:lstStyle/>
           <a:p>
             <a:r>
-              <a:rPr lang="hu-HU" dirty="0" smtClean="0">
+              <a:rPr lang="hu-HU" dirty="0">
                 <a:latin typeface="Times New Roman" panose="02020603050405020304" pitchFamily="18" charset="0"/>
                 <a:cs typeface="Times New Roman" panose="02020603050405020304" pitchFamily="18" charset="0"/>
               </a:rPr>
               <a:t>Adatbázis tervrajz</a:t>
             </a:r>
-            <a:endParaRPr lang="hu-HU" dirty="0">
-              <a:latin typeface="Times New Roman" panose="02020603050405020304" pitchFamily="18" charset="0"/>
-              <a:cs typeface="Times New Roman" panose="02020603050405020304" pitchFamily="18" charset="0"/>
-            </a:endParaRPr>
           </a:p>
         </p:txBody>
       </p:sp>
@@ -18446,25 +18257,18 @@
   <p:clrMapOvr>
     <a:masterClrMapping/>
   </p:clrMapOvr>
-  <mc:AlternateContent xmlns:mc="http://schemas.openxmlformats.org/markup-compatibility/2006">
-    <mc:Choice xmlns:p14="http://schemas.microsoft.com/office/powerpoint/2010/main" Requires="p14">
+  <mc:AlternateContent xmlns:mc="http://schemas.openxmlformats.org/markup-compatibility/2006" xmlns:p14="http://schemas.microsoft.com/office/powerpoint/2010/main">
+    <mc:Choice Requires="p14">
       <p:transition spd="slow" p14:dur="2500">
         <p:checker/>
       </p:transition>
     </mc:Choice>
-    <mc:Fallback>
+    <mc:Fallback xmlns="">
       <p:transition spd="slow">
         <p:checker/>
       </p:transition>
     </mc:Fallback>
   </mc:AlternateContent>
-  <p:timing>
-    <p:tnLst>
-      <p:par>
-        <p:cTn id="1" dur="indefinite" restart="never" nodeType="tmRoot"/>
-      </p:par>
-    </p:tnLst>
-  </p:timing>
 </p:sld>
 </file>
 
@@ -18501,7 +18305,7 @@
           <a:lstStyle/>
           <a:p>
             <a:r>
-              <a:rPr lang="hu-HU" dirty="0" smtClean="0">
+              <a:rPr lang="hu-HU" dirty="0">
                 <a:solidFill>
                   <a:schemeClr val="bg1"/>
                 </a:solidFill>
@@ -18510,13 +18314,6 @@
               </a:rPr>
               <a:t>A GIT használata</a:t>
             </a:r>
-            <a:endParaRPr lang="hu-HU" dirty="0">
-              <a:solidFill>
-                <a:schemeClr val="bg1"/>
-              </a:solidFill>
-              <a:latin typeface="Times New Roman" panose="02020603050405020304" pitchFamily="18" charset="0"/>
-              <a:cs typeface="Times New Roman" panose="02020603050405020304" pitchFamily="18" charset="0"/>
-            </a:endParaRPr>
           </a:p>
         </p:txBody>
       </p:sp>
@@ -18539,7 +18336,7 @@
               <a:buNone/>
             </a:pPr>
             <a:r>
-              <a:rPr lang="hu-HU" dirty="0" smtClean="0">
+              <a:rPr lang="hu-HU" dirty="0">
                 <a:solidFill>
                   <a:schemeClr val="bg1"/>
                 </a:solidFill>
@@ -18554,7 +18351,7 @@
               <a:buNone/>
             </a:pPr>
             <a:r>
-              <a:rPr lang="hu-HU" dirty="0" smtClean="0">
+              <a:rPr lang="hu-HU" dirty="0">
                 <a:solidFill>
                   <a:schemeClr val="bg1"/>
                 </a:solidFill>
@@ -18569,7 +18366,7 @@
               <a:buNone/>
             </a:pPr>
             <a:r>
-              <a:rPr lang="hu-HU" dirty="0" smtClean="0">
+              <a:rPr lang="hu-HU" dirty="0">
                 <a:solidFill>
                   <a:schemeClr val="bg1"/>
                 </a:solidFill>
@@ -18595,7 +18392,7 @@
             <a:pPr marL="0" indent="0">
               <a:buNone/>
             </a:pPr>
-            <a:endParaRPr lang="hu-HU" dirty="0" smtClean="0">
+            <a:endParaRPr lang="hu-HU" dirty="0">
               <a:solidFill>
                 <a:schemeClr val="bg1"/>
               </a:solidFill>
@@ -18608,7 +18405,7 @@
               <a:buNone/>
             </a:pPr>
             <a:r>
-              <a:rPr lang="hu-HU" dirty="0" smtClean="0">
+              <a:rPr lang="hu-HU" dirty="0">
                 <a:solidFill>
                   <a:schemeClr val="bg1"/>
                 </a:solidFill>
@@ -18617,13 +18414,6 @@
               </a:rPr>
               <a:t>Rendkívül ajánlott</a:t>
             </a:r>
-            <a:endParaRPr lang="hu-HU" dirty="0">
-              <a:solidFill>
-                <a:schemeClr val="bg1"/>
-              </a:solidFill>
-              <a:latin typeface="Times New Roman" panose="02020603050405020304" pitchFamily="18" charset="0"/>
-              <a:cs typeface="Times New Roman" panose="02020603050405020304" pitchFamily="18" charset="0"/>
-            </a:endParaRPr>
           </a:p>
         </p:txBody>
       </p:sp>
@@ -18637,25 +18427,18 @@
   <p:clrMapOvr>
     <a:masterClrMapping/>
   </p:clrMapOvr>
-  <mc:AlternateContent xmlns:mc="http://schemas.openxmlformats.org/markup-compatibility/2006">
-    <mc:Choice xmlns:p15="http://schemas.microsoft.com/office/powerpoint/2012/main" Requires="p15">
+  <mc:AlternateContent xmlns:mc="http://schemas.openxmlformats.org/markup-compatibility/2006" xmlns:p15="http://schemas.microsoft.com/office/powerpoint/2012/main">
+    <mc:Choice Requires="p15">
       <p:transition xmlns:p14="http://schemas.microsoft.com/office/powerpoint/2010/main" spd="slow" p14:dur="2000">
         <p15:prstTrans prst="fracture"/>
       </p:transition>
     </mc:Choice>
-    <mc:Fallback>
+    <mc:Fallback xmlns="">
       <p:transition spd="slow">
         <p:fade/>
       </p:transition>
     </mc:Fallback>
   </mc:AlternateContent>
-  <p:timing>
-    <p:tnLst>
-      <p:par>
-        <p:cTn id="1" dur="indefinite" restart="never" nodeType="tmRoot"/>
-      </p:par>
-    </p:tnLst>
-  </p:timing>
 </p:sld>
 </file>
 
@@ -18692,7 +18475,7 @@
           <a:lstStyle/>
           <a:p>
             <a:r>
-              <a:rPr lang="hu-HU" dirty="0" smtClean="0">
+              <a:rPr lang="hu-HU" dirty="0">
                 <a:solidFill>
                   <a:schemeClr val="bg1"/>
                 </a:solidFill>
@@ -18701,13 +18484,6 @@
               </a:rPr>
               <a:t>Tesztelések és hibák</a:t>
             </a:r>
-            <a:endParaRPr lang="hu-HU" dirty="0">
-              <a:solidFill>
-                <a:schemeClr val="bg1"/>
-              </a:solidFill>
-              <a:latin typeface="Times New Roman" panose="02020603050405020304" pitchFamily="18" charset="0"/>
-              <a:cs typeface="Times New Roman" panose="02020603050405020304" pitchFamily="18" charset="0"/>
-            </a:endParaRPr>
           </a:p>
         </p:txBody>
       </p:sp>
@@ -18747,25 +18523,18 @@
   <p:clrMapOvr>
     <a:masterClrMapping/>
   </p:clrMapOvr>
-  <mc:AlternateContent xmlns:mc="http://schemas.openxmlformats.org/markup-compatibility/2006">
-    <mc:Choice xmlns:p15="http://schemas.microsoft.com/office/powerpoint/2012/main" Requires="p15">
+  <mc:AlternateContent xmlns:mc="http://schemas.openxmlformats.org/markup-compatibility/2006" xmlns:p15="http://schemas.microsoft.com/office/powerpoint/2012/main">
+    <mc:Choice Requires="p15">
       <p:transition xmlns:p14="http://schemas.microsoft.com/office/powerpoint/2010/main" spd="slow" p14:dur="1250">
         <p15:prstTrans prst="pageCurlDouble"/>
       </p:transition>
     </mc:Choice>
-    <mc:Fallback>
+    <mc:Fallback xmlns="">
       <p:transition spd="slow">
         <p:fade/>
       </p:transition>
     </mc:Fallback>
   </mc:AlternateContent>
-  <p:timing>
-    <p:tnLst>
-      <p:par>
-        <p:cTn id="1" dur="indefinite" restart="never" nodeType="tmRoot"/>
-      </p:par>
-    </p:tnLst>
-  </p:timing>
 </p:sld>
 </file>
 
@@ -18886,25 +18655,18 @@
   <p:clrMapOvr>
     <a:masterClrMapping/>
   </p:clrMapOvr>
-  <mc:AlternateContent xmlns:mc="http://schemas.openxmlformats.org/markup-compatibility/2006">
-    <mc:Choice xmlns:p15="http://schemas.microsoft.com/office/powerpoint/2012/main" Requires="p15">
+  <mc:AlternateContent xmlns:mc="http://schemas.openxmlformats.org/markup-compatibility/2006" xmlns:p15="http://schemas.microsoft.com/office/powerpoint/2012/main">
+    <mc:Choice Requires="p15">
       <p:transition xmlns:p14="http://schemas.microsoft.com/office/powerpoint/2010/main" spd="slow" p14:dur="1250">
         <p15:prstTrans prst="pageCurlDouble"/>
       </p:transition>
     </mc:Choice>
-    <mc:Fallback>
+    <mc:Fallback xmlns="">
       <p:transition spd="slow">
         <p:fade/>
       </p:transition>
     </mc:Fallback>
   </mc:AlternateContent>
-  <p:timing>
-    <p:tnLst>
-      <p:par>
-        <p:cTn id="1" dur="indefinite" restart="never" nodeType="tmRoot"/>
-      </p:par>
-    </p:tnLst>
-  </p:timing>
 </p:sld>
 </file>
 
@@ -19151,25 +18913,18 @@
   <p:clrMapOvr>
     <a:masterClrMapping/>
   </p:clrMapOvr>
-  <mc:AlternateContent xmlns:mc="http://schemas.openxmlformats.org/markup-compatibility/2006">
-    <mc:Choice xmlns:p15="http://schemas.microsoft.com/office/powerpoint/2012/main" Requires="p15">
+  <mc:AlternateContent xmlns:mc="http://schemas.openxmlformats.org/markup-compatibility/2006" xmlns:p15="http://schemas.microsoft.com/office/powerpoint/2012/main">
+    <mc:Choice Requires="p15">
       <p:transition xmlns:p14="http://schemas.microsoft.com/office/powerpoint/2010/main" spd="slow" p14:dur="1250">
         <p15:prstTrans prst="pageCurlDouble"/>
       </p:transition>
     </mc:Choice>
-    <mc:Fallback>
+    <mc:Fallback xmlns="">
       <p:transition spd="slow">
         <p:fade/>
       </p:transition>
     </mc:Fallback>
   </mc:AlternateContent>
-  <p:timing>
-    <p:tnLst>
-      <p:par>
-        <p:cTn id="1" dur="indefinite" restart="never" nodeType="tmRoot"/>
-      </p:par>
-    </p:tnLst>
-  </p:timing>
 </p:sld>
 </file>
 
@@ -19597,25 +19352,18 @@
   <p:clrMapOvr>
     <a:masterClrMapping/>
   </p:clrMapOvr>
-  <mc:AlternateContent xmlns:mc="http://schemas.openxmlformats.org/markup-compatibility/2006">
-    <mc:Choice xmlns:p15="http://schemas.microsoft.com/office/powerpoint/2012/main" Requires="p15">
+  <mc:AlternateContent xmlns:mc="http://schemas.openxmlformats.org/markup-compatibility/2006" xmlns:p15="http://schemas.microsoft.com/office/powerpoint/2012/main">
+    <mc:Choice Requires="p15">
       <p:transition xmlns:p14="http://schemas.microsoft.com/office/powerpoint/2010/main" spd="slow" p14:dur="1250">
         <p15:prstTrans prst="pageCurlDouble"/>
       </p:transition>
     </mc:Choice>
-    <mc:Fallback>
+    <mc:Fallback xmlns="">
       <p:transition spd="slow">
         <p:fade/>
       </p:transition>
     </mc:Fallback>
   </mc:AlternateContent>
-  <p:timing>
-    <p:tnLst>
-      <p:par>
-        <p:cTn id="1" dur="indefinite" restart="never" nodeType="tmRoot"/>
-      </p:par>
-    </p:tnLst>
-  </p:timing>
 </p:sld>
 </file>
 
@@ -19652,7 +19400,7 @@
           <a:lstStyle/>
           <a:p>
             <a:r>
-              <a:rPr lang="hu-HU" dirty="0" smtClean="0">
+              <a:rPr lang="hu-HU" dirty="0">
                 <a:solidFill>
                   <a:schemeClr val="bg1"/>
                 </a:solidFill>
@@ -19661,6 +19409,62 @@
               </a:rPr>
               <a:t>HTML</a:t>
             </a:r>
+          </a:p>
+        </p:txBody>
+      </p:sp>
+      <p:sp>
+        <p:nvSpPr>
+          <p:cNvPr id="3" name="Tartalom helye 2"/>
+          <p:cNvSpPr>
+            <a:spLocks noGrp="1"/>
+          </p:cNvSpPr>
+          <p:nvPr>
+            <p:ph idx="1"/>
+          </p:nvPr>
+        </p:nvSpPr>
+        <p:spPr/>
+        <p:txBody>
+          <a:bodyPr/>
+          <a:lstStyle/>
+          <a:p>
+            <a:pPr marL="0" indent="0">
+              <a:buNone/>
+            </a:pPr>
+            <a:r>
+              <a:rPr lang="hu-HU" dirty="0">
+                <a:solidFill>
+                  <a:schemeClr val="bg1"/>
+                </a:solidFill>
+                <a:latin typeface="Times New Roman" panose="02020603050405020304" pitchFamily="18" charset="0"/>
+                <a:cs typeface="Times New Roman" panose="02020603050405020304" pitchFamily="18" charset="0"/>
+              </a:rPr>
+              <a:t>Főbb elemek:</a:t>
+            </a:r>
+          </a:p>
+          <a:p>
+            <a:pPr marL="0" indent="0">
+              <a:buNone/>
+            </a:pPr>
+            <a:r>
+              <a:rPr lang="hu-HU" dirty="0">
+                <a:solidFill>
+                  <a:schemeClr val="bg1"/>
+                </a:solidFill>
+                <a:latin typeface="Times New Roman" panose="02020603050405020304" pitchFamily="18" charset="0"/>
+                <a:cs typeface="Times New Roman" panose="02020603050405020304" pitchFamily="18" charset="0"/>
+              </a:rPr>
+              <a:t>-</a:t>
+            </a:r>
+            <a:r>
+              <a:rPr lang="hu-HU" dirty="0" err="1">
+                <a:solidFill>
+                  <a:schemeClr val="bg1"/>
+                </a:solidFill>
+                <a:latin typeface="Times New Roman" panose="02020603050405020304" pitchFamily="18" charset="0"/>
+                <a:cs typeface="Times New Roman" panose="02020603050405020304" pitchFamily="18" charset="0"/>
+              </a:rPr>
+              <a:t>nav</a:t>
+            </a:r>
             <a:endParaRPr lang="hu-HU" dirty="0">
               <a:solidFill>
                 <a:schemeClr val="bg1"/>
@@ -19669,35 +19473,19 @@
               <a:cs typeface="Times New Roman" panose="02020603050405020304" pitchFamily="18" charset="0"/>
             </a:endParaRPr>
           </a:p>
-        </p:txBody>
-      </p:sp>
-      <p:sp>
-        <p:nvSpPr>
-          <p:cNvPr id="3" name="Tartalom helye 2"/>
-          <p:cNvSpPr>
-            <a:spLocks noGrp="1"/>
-          </p:cNvSpPr>
-          <p:nvPr>
-            <p:ph idx="1"/>
-          </p:nvPr>
-        </p:nvSpPr>
-        <p:spPr/>
-        <p:txBody>
-          <a:bodyPr/>
-          <a:lstStyle/>
           <a:p>
             <a:pPr marL="0" indent="0">
               <a:buNone/>
             </a:pPr>
             <a:r>
-              <a:rPr lang="hu-HU" dirty="0" smtClean="0">
+              <a:rPr lang="hu-HU" dirty="0">
                 <a:solidFill>
                   <a:schemeClr val="bg1"/>
                 </a:solidFill>
                 <a:latin typeface="Times New Roman" panose="02020603050405020304" pitchFamily="18" charset="0"/>
                 <a:cs typeface="Times New Roman" panose="02020603050405020304" pitchFamily="18" charset="0"/>
               </a:rPr>
-              <a:t>Főbb elemek:</a:t>
+              <a:t>-div</a:t>
             </a:r>
           </a:p>
           <a:p>
@@ -19705,7 +19493,7 @@
               <a:buNone/>
             </a:pPr>
             <a:r>
-              <a:rPr lang="hu-HU" dirty="0" smtClean="0">
+              <a:rPr lang="hu-HU" dirty="0">
                 <a:solidFill>
                   <a:schemeClr val="bg1"/>
                 </a:solidFill>
@@ -19715,36 +19503,24 @@
               <a:t>-</a:t>
             </a:r>
             <a:r>
-              <a:rPr lang="hu-HU" dirty="0" err="1" smtClean="0">
+              <a:rPr lang="hu-HU" dirty="0" err="1">
                 <a:solidFill>
                   <a:schemeClr val="bg1"/>
                 </a:solidFill>
                 <a:latin typeface="Times New Roman" panose="02020603050405020304" pitchFamily="18" charset="0"/>
                 <a:cs typeface="Times New Roman" panose="02020603050405020304" pitchFamily="18" charset="0"/>
               </a:rPr>
-              <a:t>nav</a:t>
-            </a:r>
-            <a:endParaRPr lang="hu-HU" dirty="0" smtClean="0">
-              <a:solidFill>
-                <a:schemeClr val="bg1"/>
-              </a:solidFill>
-              <a:latin typeface="Times New Roman" panose="02020603050405020304" pitchFamily="18" charset="0"/>
-              <a:cs typeface="Times New Roman" panose="02020603050405020304" pitchFamily="18" charset="0"/>
-            </a:endParaRPr>
-          </a:p>
-          <a:p>
-            <a:pPr marL="0" indent="0">
-              <a:buNone/>
-            </a:pPr>
-            <a:r>
-              <a:rPr lang="hu-HU" dirty="0" smtClean="0">
+              <a:t>ul</a:t>
+            </a:r>
+            <a:r>
+              <a:rPr lang="hu-HU" dirty="0">
                 <a:solidFill>
                   <a:schemeClr val="bg1"/>
                 </a:solidFill>
                 <a:latin typeface="Times New Roman" panose="02020603050405020304" pitchFamily="18" charset="0"/>
                 <a:cs typeface="Times New Roman" panose="02020603050405020304" pitchFamily="18" charset="0"/>
               </a:rPr>
-              <a:t>-div</a:t>
+              <a:t> és li</a:t>
             </a:r>
           </a:p>
           <a:p>
@@ -19752,7 +19528,7 @@
               <a:buNone/>
             </a:pPr>
             <a:r>
-              <a:rPr lang="hu-HU" dirty="0" smtClean="0">
+              <a:rPr lang="hu-HU" dirty="0">
                 <a:solidFill>
                   <a:schemeClr val="bg1"/>
                 </a:solidFill>
@@ -19762,32 +19538,29 @@
               <a:t>-</a:t>
             </a:r>
             <a:r>
-              <a:rPr lang="hu-HU" dirty="0" err="1" smtClean="0">
+              <a:rPr lang="hu-HU" dirty="0" err="1">
                 <a:solidFill>
                   <a:schemeClr val="bg1"/>
                 </a:solidFill>
                 <a:latin typeface="Times New Roman" panose="02020603050405020304" pitchFamily="18" charset="0"/>
                 <a:cs typeface="Times New Roman" panose="02020603050405020304" pitchFamily="18" charset="0"/>
               </a:rPr>
-              <a:t>ul</a:t>
-            </a:r>
-            <a:r>
-              <a:rPr lang="hu-HU" dirty="0" smtClean="0">
-                <a:solidFill>
-                  <a:schemeClr val="bg1"/>
-                </a:solidFill>
-                <a:latin typeface="Times New Roman" panose="02020603050405020304" pitchFamily="18" charset="0"/>
-                <a:cs typeface="Times New Roman" panose="02020603050405020304" pitchFamily="18" charset="0"/>
-              </a:rPr>
-              <a:t> és li</a:t>
-            </a:r>
+              <a:t>section</a:t>
+            </a:r>
+            <a:endParaRPr lang="hu-HU" dirty="0">
+              <a:solidFill>
+                <a:schemeClr val="bg1"/>
+              </a:solidFill>
+              <a:latin typeface="Times New Roman" panose="02020603050405020304" pitchFamily="18" charset="0"/>
+              <a:cs typeface="Times New Roman" panose="02020603050405020304" pitchFamily="18" charset="0"/>
+            </a:endParaRPr>
           </a:p>
           <a:p>
             <a:pPr marL="0" indent="0">
               <a:buNone/>
             </a:pPr>
             <a:r>
-              <a:rPr lang="hu-HU" dirty="0" smtClean="0">
+              <a:rPr lang="hu-HU" dirty="0">
                 <a:solidFill>
                   <a:schemeClr val="bg1"/>
                 </a:solidFill>
@@ -19797,39 +19570,7 @@
               <a:t>-</a:t>
             </a:r>
             <a:r>
-              <a:rPr lang="hu-HU" dirty="0" err="1" smtClean="0">
-                <a:solidFill>
-                  <a:schemeClr val="bg1"/>
-                </a:solidFill>
-                <a:latin typeface="Times New Roman" panose="02020603050405020304" pitchFamily="18" charset="0"/>
-                <a:cs typeface="Times New Roman" panose="02020603050405020304" pitchFamily="18" charset="0"/>
-              </a:rPr>
-              <a:t>section</a:t>
-            </a:r>
-            <a:endParaRPr lang="hu-HU" dirty="0" smtClean="0">
-              <a:solidFill>
-                <a:schemeClr val="bg1"/>
-              </a:solidFill>
-              <a:latin typeface="Times New Roman" panose="02020603050405020304" pitchFamily="18" charset="0"/>
-              <a:cs typeface="Times New Roman" panose="02020603050405020304" pitchFamily="18" charset="0"/>
-            </a:endParaRPr>
-          </a:p>
-          <a:p>
-            <a:pPr marL="0" indent="0">
-              <a:buNone/>
-            </a:pPr>
-            <a:r>
-              <a:rPr lang="hu-HU" dirty="0" smtClean="0">
-                <a:solidFill>
-                  <a:schemeClr val="bg1"/>
-                </a:solidFill>
-                <a:latin typeface="Times New Roman" panose="02020603050405020304" pitchFamily="18" charset="0"/>
-                <a:cs typeface="Times New Roman" panose="02020603050405020304" pitchFamily="18" charset="0"/>
-              </a:rPr>
-              <a:t>-</a:t>
-            </a:r>
-            <a:r>
-              <a:rPr lang="hu-HU" dirty="0" err="1" smtClean="0">
+              <a:rPr lang="hu-HU" dirty="0" err="1">
                 <a:solidFill>
                   <a:schemeClr val="bg1"/>
                 </a:solidFill>
@@ -19838,7 +19579,7 @@
               </a:rPr>
               <a:t>footer</a:t>
             </a:r>
-            <a:endParaRPr lang="hu-HU" dirty="0" smtClean="0">
+            <a:endParaRPr lang="hu-HU" dirty="0">
               <a:solidFill>
                 <a:schemeClr val="bg1"/>
               </a:solidFill>
@@ -19851,7 +19592,7 @@
               <a:buNone/>
             </a:pPr>
             <a:r>
-              <a:rPr lang="hu-HU" i="1" dirty="0" smtClean="0">
+              <a:rPr lang="hu-HU" i="1" dirty="0">
                 <a:solidFill>
                   <a:schemeClr val="bg1"/>
                 </a:solidFill>
@@ -19860,13 +19601,6 @@
               </a:rPr>
               <a:t>-stb.</a:t>
             </a:r>
-            <a:endParaRPr lang="hu-HU" i="1" dirty="0">
-              <a:solidFill>
-                <a:schemeClr val="bg1"/>
-              </a:solidFill>
-              <a:latin typeface="Times New Roman" panose="02020603050405020304" pitchFamily="18" charset="0"/>
-              <a:cs typeface="Times New Roman" panose="02020603050405020304" pitchFamily="18" charset="0"/>
-            </a:endParaRPr>
           </a:p>
         </p:txBody>
       </p:sp>
@@ -19880,25 +19614,18 @@
   <p:clrMapOvr>
     <a:masterClrMapping/>
   </p:clrMapOvr>
-  <mc:AlternateContent xmlns:mc="http://schemas.openxmlformats.org/markup-compatibility/2006">
-    <mc:Choice xmlns:p15="http://schemas.microsoft.com/office/powerpoint/2012/main" Requires="p15">
+  <mc:AlternateContent xmlns:mc="http://schemas.openxmlformats.org/markup-compatibility/2006" xmlns:p15="http://schemas.microsoft.com/office/powerpoint/2012/main">
+    <mc:Choice Requires="p15">
       <p:transition xmlns:p14="http://schemas.microsoft.com/office/powerpoint/2010/main" spd="slow" p14:dur="1250">
         <p15:prstTrans prst="pageCurlDouble"/>
       </p:transition>
     </mc:Choice>
-    <mc:Fallback>
+    <mc:Fallback xmlns="">
       <p:transition spd="slow">
         <p:fade/>
       </p:transition>
     </mc:Fallback>
   </mc:AlternateContent>
-  <p:timing>
-    <p:tnLst>
-      <p:par>
-        <p:cTn id="1" dur="indefinite" restart="never" nodeType="tmRoot"/>
-      </p:par>
-    </p:tnLst>
-  </p:timing>
 </p:sld>
 </file>
 
@@ -19966,7 +19693,7 @@
           <a:lstStyle/>
           <a:p>
             <a:r>
-              <a:rPr lang="hu-HU" dirty="0" smtClean="0">
+              <a:rPr lang="hu-HU" dirty="0">
                 <a:solidFill>
                   <a:schemeClr val="tx1"/>
                 </a:solidFill>
@@ -19975,13 +19702,6 @@
               </a:rPr>
               <a:t>HTML kód részlet</a:t>
             </a:r>
-            <a:endParaRPr lang="hu-HU" dirty="0">
-              <a:solidFill>
-                <a:schemeClr val="tx1"/>
-              </a:solidFill>
-              <a:latin typeface="Times New Roman" panose="02020603050405020304" pitchFamily="18" charset="0"/>
-              <a:cs typeface="Times New Roman" panose="02020603050405020304" pitchFamily="18" charset="0"/>
-            </a:endParaRPr>
           </a:p>
         </p:txBody>
       </p:sp>
@@ -19995,25 +19715,18 @@
   <p:clrMapOvr>
     <a:masterClrMapping/>
   </p:clrMapOvr>
-  <mc:AlternateContent xmlns:mc="http://schemas.openxmlformats.org/markup-compatibility/2006">
-    <mc:Choice xmlns:p14="http://schemas.microsoft.com/office/powerpoint/2010/main" Requires="p14">
+  <mc:AlternateContent xmlns:mc="http://schemas.openxmlformats.org/markup-compatibility/2006" xmlns:p14="http://schemas.microsoft.com/office/powerpoint/2010/main">
+    <mc:Choice Requires="p14">
       <p:transition spd="med" p14:dur="700">
         <p:fade/>
       </p:transition>
     </mc:Choice>
-    <mc:Fallback>
+    <mc:Fallback xmlns="">
       <p:transition spd="med">
         <p:fade/>
       </p:transition>
     </mc:Fallback>
   </mc:AlternateContent>
-  <p:timing>
-    <p:tnLst>
-      <p:par>
-        <p:cTn id="1" dur="indefinite" restart="never" nodeType="tmRoot"/>
-      </p:par>
-    </p:tnLst>
-  </p:timing>
 </p:sld>
 </file>
 
@@ -20050,7 +19763,7 @@
           <a:lstStyle/>
           <a:p>
             <a:r>
-              <a:rPr lang="hu-HU" dirty="0" smtClean="0">
+              <a:rPr lang="hu-HU" dirty="0">
                 <a:solidFill>
                   <a:schemeClr val="bg1"/>
                 </a:solidFill>
@@ -20059,13 +19772,6 @@
               </a:rPr>
               <a:t>CSS</a:t>
             </a:r>
-            <a:endParaRPr lang="hu-HU" dirty="0">
-              <a:solidFill>
-                <a:schemeClr val="bg1"/>
-              </a:solidFill>
-              <a:latin typeface="Times New Roman" panose="02020603050405020304" pitchFamily="18" charset="0"/>
-              <a:cs typeface="Times New Roman" panose="02020603050405020304" pitchFamily="18" charset="0"/>
-            </a:endParaRPr>
           </a:p>
         </p:txBody>
       </p:sp>
@@ -20088,7 +19794,7 @@
               <a:buNone/>
             </a:pPr>
             <a:r>
-              <a:rPr lang="hu-HU" dirty="0" smtClean="0">
+              <a:rPr lang="hu-HU" dirty="0">
                 <a:solidFill>
                   <a:schemeClr val="bg1"/>
                 </a:solidFill>
@@ -20115,7 +19821,7 @@
               <a:buNone/>
             </a:pPr>
             <a:r>
-              <a:rPr lang="hu-HU" dirty="0" smtClean="0">
+              <a:rPr lang="hu-HU" dirty="0">
                 <a:solidFill>
                   <a:schemeClr val="bg1"/>
                 </a:solidFill>
@@ -20130,7 +19836,7 @@
               <a:buNone/>
             </a:pPr>
             <a:r>
-              <a:rPr lang="hu-HU" dirty="0" smtClean="0">
+              <a:rPr lang="hu-HU" dirty="0">
                 <a:solidFill>
                   <a:schemeClr val="bg1"/>
                 </a:solidFill>
@@ -20145,7 +19851,7 @@
               <a:buNone/>
             </a:pPr>
             <a:r>
-              <a:rPr lang="hu-HU" dirty="0" smtClean="0">
+              <a:rPr lang="hu-HU" dirty="0">
                 <a:solidFill>
                   <a:schemeClr val="bg1"/>
                 </a:solidFill>
@@ -20160,7 +19866,7 @@
               <a:buNone/>
             </a:pPr>
             <a:r>
-              <a:rPr lang="hu-HU" i="1" dirty="0" smtClean="0">
+              <a:rPr lang="hu-HU" i="1" dirty="0">
                 <a:solidFill>
                   <a:schemeClr val="bg1"/>
                 </a:solidFill>
@@ -20185,13 +19891,6 @@
   <p:transition spd="slow">
     <p:comb/>
   </p:transition>
-  <p:timing>
-    <p:tnLst>
-      <p:par>
-        <p:cTn id="1" dur="indefinite" restart="never" nodeType="tmRoot"/>
-      </p:par>
-    </p:tnLst>
-  </p:timing>
 </p:sld>
 </file>
 
@@ -20259,7 +19958,7 @@
           <a:lstStyle/>
           <a:p>
             <a:r>
-              <a:rPr lang="hu-HU" dirty="0" smtClean="0">
+              <a:rPr lang="hu-HU" dirty="0">
                 <a:solidFill>
                   <a:schemeClr val="tx1"/>
                 </a:solidFill>
@@ -20268,13 +19967,6 @@
               </a:rPr>
               <a:t>CSS kód részlet</a:t>
             </a:r>
-            <a:endParaRPr lang="hu-HU" dirty="0">
-              <a:solidFill>
-                <a:schemeClr val="tx1"/>
-              </a:solidFill>
-              <a:latin typeface="Times New Roman" panose="02020603050405020304" pitchFamily="18" charset="0"/>
-              <a:cs typeface="Times New Roman" panose="02020603050405020304" pitchFamily="18" charset="0"/>
-            </a:endParaRPr>
           </a:p>
         </p:txBody>
       </p:sp>
@@ -20288,25 +19980,18 @@
   <p:clrMapOvr>
     <a:masterClrMapping/>
   </p:clrMapOvr>
-  <mc:AlternateContent xmlns:mc="http://schemas.openxmlformats.org/markup-compatibility/2006">
-    <mc:Choice xmlns:p14="http://schemas.microsoft.com/office/powerpoint/2010/main" Requires="p14">
+  <mc:AlternateContent xmlns:mc="http://schemas.openxmlformats.org/markup-compatibility/2006" xmlns:p14="http://schemas.microsoft.com/office/powerpoint/2010/main">
+    <mc:Choice Requires="p14">
       <p:transition spd="med" p14:dur="700">
         <p:fade/>
       </p:transition>
     </mc:Choice>
-    <mc:Fallback>
+    <mc:Fallback xmlns="">
       <p:transition spd="med">
         <p:fade/>
       </p:transition>
     </mc:Fallback>
   </mc:AlternateContent>
-  <p:timing>
-    <p:tnLst>
-      <p:par>
-        <p:cTn id="1" dur="indefinite" restart="never" nodeType="tmRoot"/>
-      </p:par>
-    </p:tnLst>
-  </p:timing>
 </p:sld>
 </file>
 
@@ -20343,7 +20028,7 @@
           <a:lstStyle/>
           <a:p>
             <a:r>
-              <a:rPr lang="hu-HU" dirty="0" smtClean="0">
+              <a:rPr lang="hu-HU" dirty="0">
                 <a:solidFill>
                   <a:schemeClr val="bg1"/>
                 </a:solidFill>
@@ -20352,13 +20037,6 @@
               </a:rPr>
               <a:t>JavaScript</a:t>
             </a:r>
-            <a:endParaRPr lang="hu-HU" dirty="0">
-              <a:solidFill>
-                <a:schemeClr val="bg1"/>
-              </a:solidFill>
-              <a:latin typeface="Times New Roman" panose="02020603050405020304" pitchFamily="18" charset="0"/>
-              <a:cs typeface="Times New Roman" panose="02020603050405020304" pitchFamily="18" charset="0"/>
-            </a:endParaRPr>
           </a:p>
         </p:txBody>
       </p:sp>
@@ -20381,7 +20059,7 @@
               <a:buNone/>
             </a:pPr>
             <a:r>
-              <a:rPr lang="hu-HU" dirty="0" smtClean="0">
+              <a:rPr lang="hu-HU" dirty="0">
                 <a:solidFill>
                   <a:schemeClr val="bg1"/>
                 </a:solidFill>
@@ -20396,7 +20074,7 @@
               <a:buNone/>
             </a:pPr>
             <a:r>
-              <a:rPr lang="hu-HU" dirty="0" smtClean="0">
+              <a:rPr lang="hu-HU" dirty="0">
                 <a:solidFill>
                   <a:schemeClr val="bg1"/>
                 </a:solidFill>
@@ -20411,7 +20089,7 @@
               <a:buNone/>
             </a:pPr>
             <a:r>
-              <a:rPr lang="hu-HU" dirty="0" smtClean="0">
+              <a:rPr lang="hu-HU" dirty="0">
                 <a:solidFill>
                   <a:schemeClr val="bg1"/>
                 </a:solidFill>
@@ -20426,7 +20104,7 @@
               <a:buNone/>
             </a:pPr>
             <a:r>
-              <a:rPr lang="hu-HU" dirty="0" smtClean="0">
+              <a:rPr lang="hu-HU" dirty="0">
                 <a:solidFill>
                   <a:schemeClr val="bg1"/>
                 </a:solidFill>
@@ -20435,18 +20113,6 @@
               </a:rPr>
               <a:t>-Végleges ár kiszámítása</a:t>
             </a:r>
-          </a:p>
-          <a:p>
-            <a:pPr marL="0" indent="0">
-              <a:buNone/>
-            </a:pPr>
-            <a:endParaRPr lang="hu-HU" dirty="0" smtClean="0">
-              <a:solidFill>
-                <a:schemeClr val="bg1"/>
-              </a:solidFill>
-              <a:latin typeface="Times New Roman" panose="02020603050405020304" pitchFamily="18" charset="0"/>
-              <a:cs typeface="Times New Roman" panose="02020603050405020304" pitchFamily="18" charset="0"/>
-            </a:endParaRPr>
           </a:p>
           <a:p>
             <a:pPr marL="0" indent="0">
@@ -20464,8 +20130,20 @@
             <a:pPr marL="0" indent="0">
               <a:buNone/>
             </a:pPr>
-            <a:r>
-              <a:rPr lang="hu-HU" i="1" dirty="0" smtClean="0">
+            <a:endParaRPr lang="hu-HU" dirty="0">
+              <a:solidFill>
+                <a:schemeClr val="bg1"/>
+              </a:solidFill>
+              <a:latin typeface="Times New Roman" panose="02020603050405020304" pitchFamily="18" charset="0"/>
+              <a:cs typeface="Times New Roman" panose="02020603050405020304" pitchFamily="18" charset="0"/>
+            </a:endParaRPr>
+          </a:p>
+          <a:p>
+            <a:pPr marL="0" indent="0">
+              <a:buNone/>
+            </a:pPr>
+            <a:r>
+              <a:rPr lang="hu-HU" i="1" dirty="0">
                 <a:solidFill>
                   <a:schemeClr val="bg1"/>
                 </a:solidFill>
@@ -20474,13 +20152,6 @@
               </a:rPr>
               <a:t>További fontos funkciók…</a:t>
             </a:r>
-            <a:endParaRPr lang="hu-HU" i="1" dirty="0">
-              <a:solidFill>
-                <a:schemeClr val="bg1"/>
-              </a:solidFill>
-              <a:latin typeface="Times New Roman" panose="02020603050405020304" pitchFamily="18" charset="0"/>
-              <a:cs typeface="Times New Roman" panose="02020603050405020304" pitchFamily="18" charset="0"/>
-            </a:endParaRPr>
           </a:p>
         </p:txBody>
       </p:sp>
@@ -20497,13 +20168,6 @@
   <p:transition spd="slow">
     <p:comb/>
   </p:transition>
-  <p:timing>
-    <p:tnLst>
-      <p:par>
-        <p:cTn id="1" dur="indefinite" restart="never" nodeType="tmRoot"/>
-      </p:par>
-    </p:tnLst>
-  </p:timing>
 </p:sld>
 </file>
 
@@ -20593,7 +20257,7 @@
           <a:lstStyle/>
           <a:p>
             <a:r>
-              <a:rPr lang="hu-HU" dirty="0" smtClean="0">
+              <a:rPr lang="hu-HU" dirty="0">
                 <a:solidFill>
                   <a:schemeClr val="tx1"/>
                 </a:solidFill>
@@ -20602,13 +20266,6 @@
               </a:rPr>
               <a:t>JavaScript kód részlet és kosármenü</a:t>
             </a:r>
-            <a:endParaRPr lang="hu-HU" dirty="0">
-              <a:solidFill>
-                <a:schemeClr val="tx1"/>
-              </a:solidFill>
-              <a:latin typeface="Times New Roman" panose="02020603050405020304" pitchFamily="18" charset="0"/>
-              <a:cs typeface="Times New Roman" panose="02020603050405020304" pitchFamily="18" charset="0"/>
-            </a:endParaRPr>
           </a:p>
         </p:txBody>
       </p:sp>
@@ -20622,25 +20279,18 @@
   <p:clrMapOvr>
     <a:masterClrMapping/>
   </p:clrMapOvr>
-  <mc:AlternateContent xmlns:mc="http://schemas.openxmlformats.org/markup-compatibility/2006">
-    <mc:Choice xmlns:p14="http://schemas.microsoft.com/office/powerpoint/2010/main" Requires="p14">
+  <mc:AlternateContent xmlns:mc="http://schemas.openxmlformats.org/markup-compatibility/2006" xmlns:p14="http://schemas.microsoft.com/office/powerpoint/2010/main">
+    <mc:Choice Requires="p14">
       <p:transition spd="med" p14:dur="700">
         <p:fade/>
       </p:transition>
     </mc:Choice>
-    <mc:Fallback>
+    <mc:Fallback xmlns="">
       <p:transition spd="med">
         <p:fade/>
       </p:transition>
     </mc:Fallback>
   </mc:AlternateContent>
-  <p:timing>
-    <p:tnLst>
-      <p:par>
-        <p:cTn id="1" dur="indefinite" restart="never" nodeType="tmRoot"/>
-      </p:par>
-    </p:tnLst>
-  </p:timing>
 </p:sld>
 </file>
 
